--- a/10-Knowledge-Products/KP1-GEA/videos/module_4/en/decks/KP1_M4_4.1_Deck_v0.2.pptx
+++ b/10-Knowledge-Products/KP1-GEA/videos/module_4/en/decks/KP1_M4_4.1_Deck_v0.2.pptx
@@ -14,7 +14,6 @@
     <p:handoutMasterId r:id="rId47"/>
   </p:handoutMasterIdLst>
   <p:sldIdLst>
-    <p:sldId id="2681" r:id="rId8"/>
     <p:sldId id="2696" r:id="rId18"/>
     <p:sldId id="2697" r:id="rId19"/>
     <p:sldId id="2698" r:id="rId20"/>
@@ -22,6 +21,7 @@
     <p:sldId id="2700" r:id="rId22"/>
     <p:sldId id="2701" r:id="rId23"/>
     <p:sldId id="2702" r:id="rId24"/>
+    <p:sldId id="2703" r:id="rId25"/>
   </p:sldIdLst>
   <p:sldSz cx="12192000" cy="6858000"/>
   <p:notesSz cx="6858000" cy="9144000"/>
@@ -888,7 +888,7 @@
 </p:notesMaster>
 </file>
 
-<file path=ppt/notesSlides/notesSlide21.xml><?xml version="1.0" encoding="utf-8"?>
+<file path=ppt/notesSlides/notesSlide10.xml><?xml version="1.0" encoding="utf-8"?>
 <p:notes xmlns:a="http://schemas.openxmlformats.org/drawingml/2006/main" xmlns:p="http://schemas.openxmlformats.org/presentationml/2006/main" xmlns:r="http://schemas.openxmlformats.org/officeDocument/2006/relationships">
   <p:cSld>
     <p:spTree>
@@ -933,7 +933,7 @@
           <a:lstStyle/>
           <a:p>
             <a:r>
-              <a:t>Title card for standalone video 4.1. Content slides are identical to the corresponding section of the combined deck KP1_M4_Deck_v0.2.pptx; voice-over is in each slide’s notes.</a:t>
+              <a:t>Sources slide, held ~5 seconds at the end of the video. Links are compiled into the YouTube description per ITU convention; no URLs read aloud.</a:t>
             </a:r>
           </a:p>
         </p:txBody>
@@ -1003,13 +1003,7 @@
           <a:lstStyle/>
           <a:p>
             <a:r>
-              <a:t>VO, slide 1: To see the method work, you need a realistic place to run it. Progressa is a demonstration country with an education sector like many across the continent — real institutions, a real fragmentation problem, and a minister who wants results.</a:t>
-            </a:r>
-          </a:p>
-          <a:p/>
-          <a:p>
-            <a:r>
-              <a:t>On screen: Progressa is a fictional demonstration country. All institutions are fictional and appear as plain-text labels — no emblems, no logos.</a:t>
+              <a:t>Title card — the cold open. The hosts name the module, the video number, the title and the single message on this slide; no scripted narration. Hold until the opener begins; the opener is narrated on the next slide.</a:t>
             </a:r>
           </a:p>
         </p:txBody>
@@ -1079,13 +1073,13 @@
           <a:lstStyle/>
           <a:p>
             <a:r>
-              <a:t>VO: Progressa's education sector has five bodies that matter. The Ministry of Education, Youth and Sport sets policy and funds schools. The National Examination Authority runs examinations and certifies results. The Learner Registry is meant to be the one list of who is a learner. The National Identity Authority owns the person identity every sector reuses. And the Digital Government Authority runs the shared data-exchange backbone and payments. Five bodies — a policy unit, a service authority, two registries, and a shared-platform provider.</a:t>
+              <a:t>VO: To see the method work, you need a realistic place to run it. Progressa is a demonstration country with an education sector like many across the continent — real institutions, a real fragmentation problem, and a minister who wants results.</a:t>
             </a:r>
           </a:p>
           <a:p/>
           <a:p>
             <a:r>
-              <a:t>Production cue: this is the cast for the whole module. Hold it a beat longer than a normal list slide — every later video refers back to these five.</a:t>
+              <a:t>On screen: Progressa is a fictional demonstration country. All institutions are fictional and appear as plain-text labels — no emblems, no logos.</a:t>
             </a:r>
           </a:p>
         </p:txBody>
@@ -1155,7 +1149,13 @@
           <a:lstStyle/>
           <a:p>
             <a:r>
-              <a:t>VO: Here is the problem the minister feels. A learner is registered three times — once in the school census, once by the Examination Authority for exams, once by a social grant programme. None of the three lists agree. A parent proves the child's identity on paper at every counter, because no system trusts another's. The minister has promised a single learner record that follows the child from primary school to university — and it cannot be delivered, because the systems do not fit together. This is not a Progressa problem. It is the problem most education sectors share.</a:t>
+              <a:t>VO: Progressa's education sector has five bodies that matter. The Ministry of Education, Youth and Sport sets policy and funds schools. The National Examination Authority runs examinations and certifies results. The Learner Registry is meant to be the one list of who is a learner. The National Identity Authority owns the person identity every sector reuses. And the Digital Government Authority runs the shared data-exchange backbone and payments. Five bodies — a policy unit, a service authority, two registries, and a shared-platform provider.</a:t>
+            </a:r>
+          </a:p>
+          <a:p/>
+          <a:p>
+            <a:r>
+              <a:t>Production cue: this is the cast for the whole module. Hold it a beat longer than a normal list slide — every later video refers back to these five.</a:t>
             </a:r>
           </a:p>
         </p:txBody>
@@ -1225,7 +1225,7 @@
           <a:lstStyle/>
           <a:p>
             <a:r>
-              <a:t>VO: Progressa is fictional on purpose: it shows every step without exposing any real country, and its shapes — duplicate registries, paper re-entry, a stalled flagship — are the ones you will recognise. At each step, ask what the equivalent would be in your own sector.</a:t>
+              <a:t>VO: Here is the problem the minister feels. A learner is registered three times — once in the school census, once by the Examination Authority for exams, once by a social grant programme. None of the three lists agree. A parent proves the child's identity on paper at every counter, because no system trusts another's. The minister has promised a single learner record that follows the child from primary school to university — and it cannot be delivered, because the systems do not fit together. This is not a Progressa problem. It is the problem most education sectors share.</a:t>
             </a:r>
           </a:p>
         </p:txBody>
@@ -1295,13 +1295,7 @@
           <a:lstStyle/>
           <a:p>
             <a:r>
-              <a:t>VO: Running the method on Progressa produces six things across the five phases: a picture of what exists today, a ranked gap analysis, a localised framework with build, buy or share calls, a target architecture, a sequenced costed roadmap, and a living, governed architecture — six deliverables, produced in that order.</a:t>
-            </a:r>
-          </a:p>
-          <a:p/>
-          <a:p>
-            <a:r>
-              <a:t>Production cue: the advance organiser for the module — one sentence of narration, so let the six rows sit on screen while it is read.</a:t>
+              <a:t>VO: Progressa is fictional on purpose: it shows every step without exposing any real country, and its shapes — duplicate registries, paper re-entry, a stalled flagship — are the ones you will recognise. At each step, ask what the equivalent would be in your own sector.</a:t>
             </a:r>
           </a:p>
         </p:txBody>
@@ -1371,13 +1365,13 @@
           <a:lstStyle/>
           <a:p>
             <a:r>
-              <a:t>PRACTICE BOX (on-screen only — never read it, never paraphrase it, never point at it). It replaces the narrated handoff: this video ends on the recap and the Sources slide.</a:t>
+              <a:t>VO: Running the method on Progressa produces six things across the five phases: a picture of what exists today, a ranked gap analysis, a localised framework with build, buy or share calls, a target architecture, a sequenced costed roadmap, and a living, governed architecture — six deliverables, produced in that order.</a:t>
             </a:r>
           </a:p>
           <a:p/>
           <a:p>
             <a:r>
-              <a:t>VO: So this is Progressa. A realistic education sector, five institutions, and the fragmentation problem most countries live with — the canvas the whole method runs on.</a:t>
+              <a:t>Production cue: the advance organiser for the module — one sentence of narration, so let the six rows sit on screen while it is read.</a:t>
             </a:r>
           </a:p>
         </p:txBody>
@@ -1447,7 +1441,13 @@
           <a:lstStyle/>
           <a:p>
             <a:r>
-              <a:t>Sources slide, held ~5 seconds at the end of the video. Links are compiled into the YouTube description per ITU convention; no URLs read aloud.</a:t>
+              <a:t>PRACTICE BOX (on-screen only — never read it, never paraphrase it, never point at it). It replaces the narrated handoff: this video ends on the recap and the Sources slide.</a:t>
+            </a:r>
+          </a:p>
+          <a:p/>
+          <a:p>
+            <a:r>
+              <a:t>VO: So this is Progressa. A realistic education sector, five institutions, and the fragmentation problem most countries live with — the canvas the whole method runs on.</a:t>
             </a:r>
           </a:p>
         </p:txBody>
@@ -11608,8 +11608,8 @@
 </p:sldMaster>
 </file>
 
-<file path=ppt/slides/slide1.xml><?xml version="1.0" encoding="utf-8"?>
-<p:sld xmlns:a="http://schemas.openxmlformats.org/drawingml/2006/main" xmlns:r="http://schemas.openxmlformats.org/officeDocument/2006/relationships" xmlns:p="http://schemas.openxmlformats.org/presentationml/2006/main">
+<file path=ppt/slides/slide10.xml><?xml version="1.0" encoding="utf-8"?>
+<p:sld xmlns:a="http://schemas.openxmlformats.org/drawingml/2006/main" xmlns:p="http://schemas.openxmlformats.org/presentationml/2006/main" xmlns:r="http://schemas.openxmlformats.org/officeDocument/2006/relationships">
   <p:cSld>
     <p:spTree>
       <p:nvGrpSpPr>
@@ -11617,319 +11617,17 @@
         <p:cNvGrpSpPr/>
         <p:nvPr/>
       </p:nvGrpSpPr>
-      <p:grpSpPr>
-        <a:xfrm>
-          <a:off x="0" y="0"/>
-          <a:ext cx="0" cy="0"/>
-          <a:chOff x="0" y="0"/>
-          <a:chExt cx="0" cy="0"/>
-        </a:xfrm>
-      </p:grpSpPr>
-      <p:cxnSp>
-        <p:nvCxnSpPr>
-          <p:cNvPr id="11" name="Straight Connector 10">
-            <a:extLst>
-              <a:ext uri="{FF2B5EF4-FFF2-40B4-BE49-F238E27FC236}">
-                <a16:creationId xmlns:a16="http://schemas.microsoft.com/office/drawing/2014/main" id="{D9AD66F2-F7C0-4D03-9150-D28F17AC561D}"/>
-              </a:ext>
-            </a:extLst>
-          </p:cNvPr>
-          <p:cNvCxnSpPr>
-            <a:cxnSpLocks/>
-          </p:cNvCxnSpPr>
-          <p:nvPr/>
-        </p:nvCxnSpPr>
-        <p:spPr>
-          <a:xfrm>
-            <a:off x="373021" y="2198718"/>
-            <a:ext cx="6843567" cy="0"/>
-          </a:xfrm>
-          <a:prstGeom prst="line">
-            <a:avLst/>
-          </a:prstGeom>
-          <a:ln w="12700">
-            <a:solidFill>
-              <a:srgbClr val="009CD6"/>
-            </a:solidFill>
-          </a:ln>
-        </p:spPr>
-        <p:style>
-          <a:lnRef idx="1">
-            <a:schemeClr val="accent1"/>
-          </a:lnRef>
-          <a:fillRef idx="0">
-            <a:schemeClr val="accent1"/>
-          </a:fillRef>
-          <a:effectRef idx="0">
-            <a:schemeClr val="accent1"/>
-          </a:effectRef>
-          <a:fontRef idx="minor">
-            <a:schemeClr val="tx1"/>
-          </a:fontRef>
-        </p:style>
-      </p:cxnSp>
-      <p:sp>
-        <p:nvSpPr>
-          <p:cNvPr id="12" name="Title 9">
-            <a:extLst>
-              <a:ext uri="{FF2B5EF4-FFF2-40B4-BE49-F238E27FC236}">
-                <a16:creationId xmlns:a16="http://schemas.microsoft.com/office/drawing/2014/main" id="{EEB08032-CE0E-4986-AEDF-A41026C0E8B9}"/>
-              </a:ext>
-            </a:extLst>
-          </p:cNvPr>
-          <p:cNvSpPr txBox="1">
-            <a:spLocks/>
-          </p:cNvSpPr>
-          <p:nvPr/>
-        </p:nvSpPr>
-        <p:spPr>
-          <a:xfrm>
-            <a:off x="237734" y="702833"/>
-            <a:ext cx="6432007" cy="1218817"/>
-          </a:xfrm>
-          <a:prstGeom prst="rect">
-            <a:avLst/>
-          </a:prstGeom>
-        </p:spPr>
-        <p:txBody>
-          <a:bodyPr anchor="b">
-            <a:noAutofit/>
-          </a:bodyPr>
-          <a:lstStyle>
-            <a:lvl1pPr algn="l" defTabSz="914400" rtl="0" eaLnBrk="1" latinLnBrk="0" hangingPunct="1">
-              <a:lnSpc>
-                <a:spcPct val="90000"/>
-              </a:lnSpc>
-              <a:spcBef>
-                <a:spcPct val="0"/>
-              </a:spcBef>
-              <a:buNone/>
-              <a:defRPr sz="4000" kern="1200">
-                <a:solidFill>
-                  <a:schemeClr val="bg1"/>
-                </a:solidFill>
-                <a:latin typeface="Arial" panose="020B0604020202020204" pitchFamily="34" charset="0"/>
-                <a:ea typeface="+mj-ea"/>
-                <a:cs typeface="Arial" panose="020B0604020202020204" pitchFamily="34" charset="0"/>
-              </a:defRPr>
-            </a:lvl1pPr>
-          </a:lstStyle>
-          <a:p>
-            <a:r>
-              <a:rPr sz="2400" b="1" i="0">
-                <a:solidFill>
-                  <a:srgbClr val="1A1A1A"/>
-                </a:solidFill>
-                <a:latin typeface="Arial"/>
-              </a:rPr>
-              <a:t>4.1 — Meet Progressa — a real sector with a real fragmentation problem</a:t>
-            </a:r>
-          </a:p>
-        </p:txBody>
-      </p:sp>
-      <p:pic>
-        <p:nvPicPr>
-          <p:cNvPr id="7" name="Picture 6">
-            <a:extLst>
-              <a:ext uri="{FF2B5EF4-FFF2-40B4-BE49-F238E27FC236}">
-                <a16:creationId xmlns:a16="http://schemas.microsoft.com/office/drawing/2014/main" id="{A2066351-C569-4C4C-A096-308777FCDC32}"/>
-              </a:ext>
-            </a:extLst>
-          </p:cNvPr>
-          <p:cNvPicPr>
-            <a:picLocks noChangeAspect="1"/>
-          </p:cNvPicPr>
-          <p:nvPr/>
-        </p:nvPicPr>
-        <p:blipFill>
-          <a:blip r:embed="rId2">
-            <a:extLst>
-              <a:ext uri="{28A0092B-C50C-407E-A947-70E740481C1C}">
-                <a14:useLocalDpi xmlns:a14="http://schemas.microsoft.com/office/drawing/2010/main" val="0"/>
-              </a:ext>
-            </a:extLst>
-          </a:blip>
-          <a:srcRect t="20219" b="14729"/>
-          <a:stretch>
-            <a:fillRect/>
-          </a:stretch>
-        </p:blipFill>
-        <p:spPr>
-          <a:xfrm>
-            <a:off x="0" y="5620871"/>
-            <a:ext cx="1323975" cy="1218816"/>
-          </a:xfrm>
-          <a:prstGeom prst="rect">
-            <a:avLst/>
-          </a:prstGeom>
-        </p:spPr>
-      </p:pic>
-      <p:sp>
-        <p:nvSpPr>
-          <p:cNvPr id="14" name="Title 9">
-            <a:extLst>
-              <a:ext uri="{FF2B5EF4-FFF2-40B4-BE49-F238E27FC236}">
-                <a16:creationId xmlns:a16="http://schemas.microsoft.com/office/drawing/2014/main" id="{B5087B80-3EE4-1881-0130-ED58CA625092}"/>
-              </a:ext>
-            </a:extLst>
-          </p:cNvPr>
-          <p:cNvSpPr txBox="1">
-            <a:spLocks/>
-          </p:cNvSpPr>
-          <p:nvPr/>
-        </p:nvSpPr>
-        <p:spPr>
-          <a:xfrm>
-            <a:off x="284452" y="2475786"/>
-            <a:ext cx="6382893" cy="953213"/>
-          </a:xfrm>
-          <a:prstGeom prst="rect">
-            <a:avLst/>
-          </a:prstGeom>
-        </p:spPr>
-        <p:txBody>
-          <a:bodyPr anchor="t">
-            <a:noAutofit/>
-          </a:bodyPr>
-          <a:lstStyle>
-            <a:lvl1pPr algn="l" defTabSz="914400" rtl="0" eaLnBrk="1" latinLnBrk="0" hangingPunct="1">
-              <a:lnSpc>
-                <a:spcPct val="90000"/>
-              </a:lnSpc>
-              <a:spcBef>
-                <a:spcPct val="0"/>
-              </a:spcBef>
-              <a:buNone/>
-              <a:defRPr sz="4000" kern="1200">
-                <a:solidFill>
-                  <a:schemeClr val="bg1"/>
-                </a:solidFill>
-                <a:latin typeface="Arial" panose="020B0604020202020204" pitchFamily="34" charset="0"/>
-                <a:ea typeface="+mj-ea"/>
-                <a:cs typeface="Arial" panose="020B0604020202020204" pitchFamily="34" charset="0"/>
-              </a:defRPr>
-            </a:lvl1pPr>
-          </a:lstStyle>
-          <a:p>
-            <a:pPr marL="0" marR="0" lvl="0" indent="0" rtl="0">
-              <a:spcBef>
-                <a:spcPts val="600"/>
-              </a:spcBef>
-              <a:spcAft>
-                <a:spcPts val="0"/>
-              </a:spcAft>
-              <a:buNone/>
-            </a:pPr>
-            <a:r>
-              <a:rPr sz="1300" b="1" i="0">
-                <a:solidFill>
-                  <a:srgbClr val="006E96"/>
-                </a:solidFill>
-                <a:latin typeface="Arial"/>
-              </a:rPr>
-              <a:t>KP1 · Government Enterprise Architecture · Module 4 · Video 4.1</a:t>
-            </a:r>
-          </a:p>
-          <a:p>
-            <a:r>
-              <a:rPr sz="1200" b="0" i="1">
-                <a:solidFill>
-                  <a:srgbClr val="595959"/>
-                </a:solidFill>
-                <a:latin typeface="Arial"/>
-              </a:rPr>
-              <a:t>Progressa is a demonstration education sector with the fragmentation problem most countries share — the same learner registered in several places, identity proven on paper. Meet its institutions and its problem, because the rest of this topic runs the full method on exactly this canvas.</a:t>
-            </a:r>
-          </a:p>
-        </p:txBody>
-      </p:sp>
-      <p:sp>
-        <p:nvSpPr>
-          <p:cNvPr id="17" name="Title 9">
-            <a:extLst>
-              <a:ext uri="{FF2B5EF4-FFF2-40B4-BE49-F238E27FC236}">
-                <a16:creationId xmlns:a16="http://schemas.microsoft.com/office/drawing/2014/main" id="{5E8796F7-DD26-D250-5E97-B38B22298E72}"/>
-              </a:ext>
-            </a:extLst>
-          </p:cNvPr>
-          <p:cNvSpPr txBox="1">
-            <a:spLocks/>
-          </p:cNvSpPr>
-          <p:nvPr/>
-        </p:nvSpPr>
-        <p:spPr>
-          <a:xfrm>
-            <a:off x="284452" y="4363897"/>
-            <a:ext cx="6382893" cy="953213"/>
-          </a:xfrm>
-          <a:prstGeom prst="rect">
-            <a:avLst/>
-          </a:prstGeom>
-        </p:spPr>
-        <p:txBody>
-          <a:bodyPr anchor="t">
-            <a:noAutofit/>
-          </a:bodyPr>
-          <a:lstStyle>
-            <a:lvl1pPr algn="l" defTabSz="914400" rtl="0" eaLnBrk="1" latinLnBrk="0" hangingPunct="1">
-              <a:lnSpc>
-                <a:spcPct val="90000"/>
-              </a:lnSpc>
-              <a:spcBef>
-                <a:spcPct val="0"/>
-              </a:spcBef>
-              <a:buNone/>
-              <a:defRPr sz="4000" kern="1200">
-                <a:solidFill>
-                  <a:schemeClr val="bg1"/>
-                </a:solidFill>
-                <a:latin typeface="Arial" panose="020B0604020202020204" pitchFamily="34" charset="0"/>
-                <a:ea typeface="+mj-ea"/>
-                <a:cs typeface="Arial" panose="020B0604020202020204" pitchFamily="34" charset="0"/>
-              </a:defRPr>
-            </a:lvl1pPr>
-          </a:lstStyle>
-          <a:p>
-            <a:pPr marL="0" marR="0" lvl="0" indent="0" rtl="0">
-              <a:spcBef>
-                <a:spcPts val="600"/>
-              </a:spcBef>
-              <a:spcAft>
-                <a:spcPts val="1200"/>
-              </a:spcAft>
-              <a:buNone/>
-            </a:pPr>
-            <a:r>
-              <a:rPr sz="1400" b="1" i="0">
-                <a:solidFill>
-                  <a:srgbClr val="1A1A1A"/>
-                </a:solidFill>
-                <a:latin typeface="Arial"/>
-              </a:rPr>
-              <a:t>Target audience: </a:t>
-            </a:r>
-            <a:r>
-              <a:rPr sz="1400" b="0" i="0">
-                <a:solidFill>
-                  <a:srgbClr val="1A1A1A"/>
-                </a:solidFill>
-                <a:latin typeface="Arial"/>
-              </a:rPr>
-              <a:t>Chief architect · senior architect · sector ICT lead</a:t>
-            </a:r>
-          </a:p>
-        </p:txBody>
-      </p:sp>
-      <p:sp>
-        <p:nvSpPr>
-          <p:cNvPr id="18" name="Rectangle 17"/>
+      <p:grpSpPr/>
+      <p:sp>
+        <p:nvSpPr>
+          <p:cNvPr id="2" name="Rectangle 1"/>
           <p:cNvSpPr/>
           <p:nvPr/>
         </p:nvSpPr>
         <p:spPr>
           <a:xfrm>
-            <a:off x="7022592" y="0"/>
-            <a:ext cx="5169103" cy="6858000"/>
+            <a:off x="457200" y="384048"/>
+            <a:ext cx="45720" cy="256032"/>
           </a:xfrm>
           <a:prstGeom prst="rect">
             <a:avLst/>
@@ -11966,14 +11664,14 @@
       </p:sp>
       <p:sp>
         <p:nvSpPr>
-          <p:cNvPr id="19" name="TextBox 18"/>
+          <p:cNvPr id="3" name="TextBox 2"/>
           <p:cNvSpPr txBox="1"/>
           <p:nvPr/>
         </p:nvSpPr>
         <p:spPr>
           <a:xfrm>
-            <a:off x="7452360" y="457200"/>
-            <a:ext cx="4297680" cy="457200"/>
+            <a:off x="621792" y="274320"/>
+            <a:ext cx="11247120" cy="914400"/>
           </a:xfrm>
           <a:prstGeom prst="rect">
             <a:avLst/>
@@ -11987,302 +11685,82 @@
           <a:lstStyle/>
           <a:p>
             <a:r>
-              <a:rPr sz="1100" b="1" i="0">
-                <a:solidFill>
-                  <a:srgbClr val="E5F5FB"/>
-                </a:solidFill>
-                <a:latin typeface="Arial"/>
-              </a:rPr>
-              <a:t>THE FIVE PHASES, RUN ON ONE SECTOR</a:t>
-            </a:r>
-          </a:p>
-        </p:txBody>
-      </p:sp>
-      <p:sp>
-        <p:nvSpPr>
-          <p:cNvPr id="20" name="Rounded Rectangle 19"/>
-          <p:cNvSpPr/>
-          <p:nvPr/>
-        </p:nvSpPr>
-        <p:spPr>
-          <a:xfrm>
-            <a:off x="7452360" y="960120"/>
-            <a:ext cx="3840480" cy="658368"/>
-          </a:xfrm>
-          <a:prstGeom prst="roundRect">
-            <a:avLst>
-              <a:gd name="adj" fmla="val 14000"/>
-            </a:avLst>
-          </a:prstGeom>
-          <a:solidFill>
-            <a:srgbClr val="FFFFFF"/>
-          </a:solidFill>
-          <a:ln>
-            <a:noFill/>
-          </a:ln>
-          <a:effectLst/>
-        </p:spPr>
-        <p:style>
-          <a:lnRef idx="1">
-            <a:schemeClr val="accent1"/>
-          </a:lnRef>
-          <a:fillRef idx="3">
-            <a:schemeClr val="accent1"/>
-          </a:fillRef>
-          <a:effectRef idx="2">
-            <a:schemeClr val="accent1"/>
-          </a:effectRef>
-          <a:fontRef idx="minor">
-            <a:schemeClr val="lt1"/>
-          </a:fontRef>
-        </p:style>
-        <p:txBody>
-          <a:bodyPr rtlCol="0" anchor="ctr" lIns="164592" wrap="square"/>
-          <a:lstStyle/>
-          <a:p>
-            <a:pPr algn="ctr"/>
-            <a:r>
-              <a:rPr sz="1500" b="1" i="0">
+              <a:rPr sz="2800" b="1" i="0">
                 <a:solidFill>
                   <a:srgbClr val="1A1A1A"/>
                 </a:solidFill>
                 <a:latin typeface="Arial"/>
               </a:rPr>
-              <a:t>Discover — an honest picture</a:t>
-            </a:r>
-          </a:p>
-        </p:txBody>
-      </p:sp>
-      <p:sp>
-        <p:nvSpPr>
-          <p:cNvPr id="21" name="Rounded Rectangle 20"/>
-          <p:cNvSpPr/>
+              <a:t>Sources</a:t>
+            </a:r>
+          </a:p>
+        </p:txBody>
+      </p:sp>
+      <p:sp>
+        <p:nvSpPr>
+          <p:cNvPr id="4" name="TextBox 3"/>
+          <p:cNvSpPr txBox="1"/>
           <p:nvPr/>
         </p:nvSpPr>
         <p:spPr>
           <a:xfrm>
-            <a:off x="7452360" y="1892808"/>
-            <a:ext cx="3840480" cy="658368"/>
-          </a:xfrm>
-          <a:prstGeom prst="roundRect">
-            <a:avLst>
-              <a:gd name="adj" fmla="val 14000"/>
-            </a:avLst>
+            <a:off x="658368" y="1554480"/>
+            <a:ext cx="10789920" cy="3840480"/>
+          </a:xfrm>
+          <a:prstGeom prst="rect">
+            <a:avLst/>
           </a:prstGeom>
-          <a:solidFill>
-            <a:srgbClr val="FFFFFF"/>
-          </a:solidFill>
-          <a:ln>
-            <a:noFill/>
-          </a:ln>
-          <a:effectLst/>
-        </p:spPr>
-        <p:style>
-          <a:lnRef idx="1">
-            <a:schemeClr val="accent1"/>
-          </a:lnRef>
-          <a:fillRef idx="3">
-            <a:schemeClr val="accent1"/>
-          </a:fillRef>
-          <a:effectRef idx="2">
-            <a:schemeClr val="accent1"/>
-          </a:effectRef>
-          <a:fontRef idx="minor">
-            <a:schemeClr val="lt1"/>
-          </a:fontRef>
-        </p:style>
-        <p:txBody>
-          <a:bodyPr rtlCol="0" anchor="ctr" lIns="164592" wrap="square"/>
+          <a:noFill/>
+        </p:spPr>
+        <p:txBody>
+          <a:bodyPr wrap="square">
+            <a:spAutoFit/>
+          </a:bodyPr>
           <a:lstStyle/>
           <a:p>
-            <a:pPr algn="ctr"/>
-            <a:r>
-              <a:rPr sz="1500" b="1" i="0">
+            <a:pPr>
+              <a:spcAft>
+                <a:spcPts val="1200"/>
+              </a:spcAft>
+            </a:pPr>
+            <a:r>
+              <a:rPr sz="1700" b="0" i="0">
                 <a:solidFill>
                   <a:srgbClr val="1A1A1A"/>
                 </a:solidFill>
                 <a:latin typeface="Arial"/>
               </a:rPr>
-              <a:t>Assess — a ranked gap analysis</a:t>
-            </a:r>
-          </a:p>
-        </p:txBody>
-      </p:sp>
-      <p:sp>
-        <p:nvSpPr>
-          <p:cNvPr id="22" name="Rounded Rectangle 21"/>
-          <p:cNvSpPr/>
-          <p:nvPr/>
-        </p:nvSpPr>
-        <p:spPr>
-          <a:xfrm>
-            <a:off x="7452360" y="2825496"/>
-            <a:ext cx="3840480" cy="658368"/>
-          </a:xfrm>
-          <a:prstGeom prst="roundRect">
-            <a:avLst>
-              <a:gd name="adj" fmla="val 14000"/>
-            </a:avLst>
-          </a:prstGeom>
-          <a:solidFill>
-            <a:srgbClr val="FFFFFF"/>
-          </a:solidFill>
-          <a:ln>
-            <a:noFill/>
-          </a:ln>
-          <a:effectLst/>
-        </p:spPr>
-        <p:style>
-          <a:lnRef idx="1">
-            <a:schemeClr val="accent1"/>
-          </a:lnRef>
-          <a:fillRef idx="3">
-            <a:schemeClr val="accent1"/>
-          </a:fillRef>
-          <a:effectRef idx="2">
-            <a:schemeClr val="accent1"/>
-          </a:effectRef>
-          <a:fontRef idx="minor">
-            <a:schemeClr val="lt1"/>
-          </a:fontRef>
-        </p:style>
-        <p:txBody>
-          <a:bodyPr rtlCol="0" anchor="ctr" lIns="164592" wrap="square"/>
-          <a:lstStyle/>
-          <a:p>
-            <a:pPr algn="ctr"/>
-            <a:r>
-              <a:rPr sz="1500" b="1" i="0">
+              <a:t>•  PAERA v1.0 — §2.1 (Problem statement)</a:t>
+            </a:r>
+          </a:p>
+          <a:p>
+            <a:pPr>
+              <a:spcAft>
+                <a:spcPts val="1200"/>
+              </a:spcAft>
+            </a:pPr>
+            <a:r>
+              <a:rPr sz="1700" b="0" i="0">
                 <a:solidFill>
                   <a:srgbClr val="1A1A1A"/>
                 </a:solidFill>
                 <a:latin typeface="Arial"/>
               </a:rPr>
-              <a:t>Adapt — framework and sourcing</a:t>
-            </a:r>
-          </a:p>
-        </p:txBody>
-      </p:sp>
-      <p:sp>
-        <p:nvSpPr>
-          <p:cNvPr id="23" name="Rounded Rectangle 22"/>
-          <p:cNvSpPr/>
-          <p:nvPr/>
-        </p:nvSpPr>
-        <p:spPr>
-          <a:xfrm>
-            <a:off x="7452360" y="3758184"/>
-            <a:ext cx="3840480" cy="658368"/>
-          </a:xfrm>
-          <a:prstGeom prst="roundRect">
-            <a:avLst>
-              <a:gd name="adj" fmla="val 14000"/>
-            </a:avLst>
-          </a:prstGeom>
-          <a:solidFill>
-            <a:srgbClr val="FFFFFF"/>
-          </a:solidFill>
-          <a:ln>
-            <a:noFill/>
-          </a:ln>
-          <a:effectLst/>
-        </p:spPr>
-        <p:style>
-          <a:lnRef idx="1">
-            <a:schemeClr val="accent1"/>
-          </a:lnRef>
-          <a:fillRef idx="3">
-            <a:schemeClr val="accent1"/>
-          </a:fillRef>
-          <a:effectRef idx="2">
-            <a:schemeClr val="accent1"/>
-          </a:effectRef>
-          <a:fontRef idx="minor">
-            <a:schemeClr val="lt1"/>
-          </a:fontRef>
-        </p:style>
-        <p:txBody>
-          <a:bodyPr rtlCol="0" anchor="ctr" lIns="164592" wrap="square"/>
-          <a:lstStyle/>
-          <a:p>
-            <a:pPr algn="ctr"/>
-            <a:r>
-              <a:rPr sz="1500" b="1" i="0">
-                <a:solidFill>
-                  <a:srgbClr val="1A1A1A"/>
-                </a:solidFill>
-                <a:latin typeface="Arial"/>
-              </a:rPr>
-              <a:t>Plan — the target, then the roadmap</a:t>
-            </a:r>
-          </a:p>
-        </p:txBody>
-      </p:sp>
-      <p:sp>
-        <p:nvSpPr>
-          <p:cNvPr id="24" name="Rounded Rectangle 23"/>
-          <p:cNvSpPr/>
-          <p:nvPr/>
-        </p:nvSpPr>
-        <p:spPr>
-          <a:xfrm>
-            <a:off x="7452360" y="4690872"/>
-            <a:ext cx="3840480" cy="658368"/>
-          </a:xfrm>
-          <a:prstGeom prst="roundRect">
-            <a:avLst>
-              <a:gd name="adj" fmla="val 14000"/>
-            </a:avLst>
-          </a:prstGeom>
-          <a:solidFill>
-            <a:srgbClr val="006E96"/>
-          </a:solidFill>
-          <a:ln>
-            <a:noFill/>
-          </a:ln>
-          <a:effectLst/>
-        </p:spPr>
-        <p:style>
-          <a:lnRef idx="1">
-            <a:schemeClr val="accent1"/>
-          </a:lnRef>
-          <a:fillRef idx="3">
-            <a:schemeClr val="accent1"/>
-          </a:fillRef>
-          <a:effectRef idx="2">
-            <a:schemeClr val="accent1"/>
-          </a:effectRef>
-          <a:fontRef idx="minor">
-            <a:schemeClr val="lt1"/>
-          </a:fontRef>
-        </p:style>
-        <p:txBody>
-          <a:bodyPr rtlCol="0" anchor="ctr" lIns="164592" wrap="square"/>
-          <a:lstStyle/>
-          <a:p>
-            <a:pPr algn="ctr"/>
-            <a:r>
-              <a:rPr sz="1500" b="1" i="0">
-                <a:solidFill>
-                  <a:srgbClr val="FFFFFF"/>
-                </a:solidFill>
-                <a:latin typeface="Arial"/>
-              </a:rPr>
-              <a:t>Execute &amp; Govern — the living EA</a:t>
-            </a:r>
-          </a:p>
-        </p:txBody>
-      </p:sp>
-      <p:sp>
-        <p:nvSpPr>
-          <p:cNvPr id="25" name="TextBox 24"/>
+              <a:t>•  PAERA v1.0 — §2.3 (Role of Enterprise Architecture)</a:t>
+            </a:r>
+          </a:p>
+        </p:txBody>
+      </p:sp>
+      <p:sp>
+        <p:nvSpPr>
+          <p:cNvPr id="5" name="TextBox 4"/>
           <p:cNvSpPr txBox="1"/>
           <p:nvPr/>
         </p:nvSpPr>
         <p:spPr>
           <a:xfrm>
-            <a:off x="7452360" y="5806440"/>
-            <a:ext cx="4297680" cy="731520"/>
+            <a:off x="658368" y="5806440"/>
+            <a:ext cx="10789920" cy="457200"/>
           </a:xfrm>
           <a:prstGeom prst="rect">
             <a:avLst/>
@@ -12296,23 +11774,52 @@
           <a:lstStyle/>
           <a:p>
             <a:r>
-              <a:rPr sz="1200" b="0" i="0">
+              <a:rPr sz="1400" b="1" i="0">
                 <a:solidFill>
-                  <a:srgbClr val="FFFFFF"/>
+                  <a:srgbClr val="006E96"/>
                 </a:solidFill>
                 <a:latin typeface="Arial"/>
               </a:rPr>
-              <a:t>5 phases · 4 sign-offs · 6 deliverables · 1 worked sector</a:t>
+              <a:t>Find the link in the description.</a:t>
+            </a:r>
+          </a:p>
+        </p:txBody>
+      </p:sp>
+      <p:sp>
+        <p:nvSpPr>
+          <p:cNvPr id="6" name="TextBox 5"/>
+          <p:cNvSpPr txBox="1"/>
+          <p:nvPr/>
+        </p:nvSpPr>
+        <p:spPr>
+          <a:xfrm>
+            <a:off x="457200" y="6473952"/>
+            <a:ext cx="7772400" cy="292608"/>
+          </a:xfrm>
+          <a:prstGeom prst="rect">
+            <a:avLst/>
+          </a:prstGeom>
+          <a:noFill/>
+        </p:spPr>
+        <p:txBody>
+          <a:bodyPr wrap="square">
+            <a:spAutoFit/>
+          </a:bodyPr>
+          <a:lstStyle/>
+          <a:p>
+            <a:r>
+              <a:rPr sz="900" b="0" i="0">
+                <a:solidFill>
+                  <a:srgbClr val="595959"/>
+                </a:solidFill>
+                <a:latin typeface="Arial"/>
+              </a:rPr>
+              <a:t>4.1 · Meet Progressa — a real sector with a real fragmentation problem</a:t>
             </a:r>
           </a:p>
         </p:txBody>
       </p:sp>
     </p:spTree>
-    <p:extLst>
-      <p:ext uri="{BB962C8B-B14F-4D97-AF65-F5344CB8AC3E}">
-        <p14:creationId xmlns:p14="http://schemas.microsoft.com/office/powerpoint/2010/main" val="1196800265"/>
-      </p:ext>
-    </p:extLst>
   </p:cSld>
   <p:clrMapOvr>
     <a:masterClrMapping/>
@@ -12520,58 +12027,14 @@
       <p:grpSpPr/>
       <p:sp>
         <p:nvSpPr>
-          <p:cNvPr id="2" name="Rectangle 1"/>
-          <p:cNvSpPr/>
-          <p:nvPr/>
-        </p:nvSpPr>
-        <p:spPr>
-          <a:xfrm>
-            <a:off x="457200" y="384048"/>
-            <a:ext cx="45720" cy="256032"/>
-          </a:xfrm>
-          <a:prstGeom prst="rect">
-            <a:avLst/>
-          </a:prstGeom>
-          <a:solidFill>
-            <a:srgbClr val="009CD6"/>
-          </a:solidFill>
-          <a:ln>
-            <a:noFill/>
-          </a:ln>
-          <a:effectLst/>
-        </p:spPr>
-        <p:style>
-          <a:lnRef idx="1">
-            <a:schemeClr val="accent1"/>
-          </a:lnRef>
-          <a:fillRef idx="3">
-            <a:schemeClr val="accent1"/>
-          </a:fillRef>
-          <a:effectRef idx="2">
-            <a:schemeClr val="accent1"/>
-          </a:effectRef>
-          <a:fontRef idx="minor">
-            <a:schemeClr val="lt1"/>
-          </a:fontRef>
-        </p:style>
-        <p:txBody>
-          <a:bodyPr rtlCol="0" anchor="ctr"/>
-          <a:lstStyle/>
-          <a:p>
-            <a:pPr algn="ctr"/>
-          </a:p>
-        </p:txBody>
-      </p:sp>
-      <p:sp>
-        <p:nvSpPr>
-          <p:cNvPr id="3" name="TextBox 2"/>
+          <p:cNvPr id="2" name="TextBox 1"/>
           <p:cNvSpPr txBox="1"/>
           <p:nvPr/>
         </p:nvSpPr>
         <p:spPr>
           <a:xfrm>
-            <a:off x="621792" y="274320"/>
-            <a:ext cx="11247120" cy="914400"/>
+            <a:off x="1005840" y="1325880"/>
+            <a:ext cx="5486400" cy="365760"/>
           </a:xfrm>
           <a:prstGeom prst="rect">
             <a:avLst/>
@@ -12585,80 +12048,61 @@
           <a:lstStyle/>
           <a:p>
             <a:r>
-              <a:rPr sz="2800" b="1" i="0">
+              <a:rPr sz="1200" b="1" i="0">
+                <a:solidFill>
+                  <a:srgbClr val="006E96"/>
+                </a:solidFill>
+                <a:latin typeface="Arial"/>
+              </a:rPr>
+              <a:t>WHERE WE START</a:t>
+            </a:r>
+          </a:p>
+        </p:txBody>
+      </p:sp>
+      <p:sp>
+        <p:nvSpPr>
+          <p:cNvPr id="3" name="TextBox 2"/>
+          <p:cNvSpPr txBox="1"/>
+          <p:nvPr/>
+        </p:nvSpPr>
+        <p:spPr>
+          <a:xfrm>
+            <a:off x="1005840" y="1783080"/>
+            <a:ext cx="10149840" cy="1737360"/>
+          </a:xfrm>
+          <a:prstGeom prst="rect">
+            <a:avLst/>
+          </a:prstGeom>
+          <a:noFill/>
+        </p:spPr>
+        <p:txBody>
+          <a:bodyPr wrap="square">
+            <a:spAutoFit/>
+          </a:bodyPr>
+          <a:lstStyle/>
+          <a:p>
+            <a:r>
+              <a:rPr sz="3000" b="1" i="0">
                 <a:solidFill>
                   <a:srgbClr val="1A1A1A"/>
                 </a:solidFill>
                 <a:latin typeface="Arial"/>
               </a:rPr>
-              <a:t>Five bodies: a policy unit, a service authority, two registries, a platform</a:t>
-            </a:r>
-          </a:p>
-        </p:txBody>
-      </p:sp>
-      <p:sp>
-        <p:nvSpPr>
-          <p:cNvPr id="4" name="Oval 3"/>
-          <p:cNvSpPr/>
-          <p:nvPr/>
-        </p:nvSpPr>
-        <p:spPr>
-          <a:xfrm>
-            <a:off x="621792" y="1508760"/>
-            <a:ext cx="310896" cy="310896"/>
-          </a:xfrm>
-          <a:prstGeom prst="ellipse">
-            <a:avLst/>
-          </a:prstGeom>
-          <a:solidFill>
-            <a:srgbClr val="009CD6"/>
-          </a:solidFill>
-          <a:ln>
-            <a:noFill/>
-          </a:ln>
-          <a:effectLst/>
-        </p:spPr>
-        <p:style>
-          <a:lnRef idx="1">
-            <a:schemeClr val="accent1"/>
-          </a:lnRef>
-          <a:fillRef idx="3">
-            <a:schemeClr val="accent1"/>
-          </a:fillRef>
-          <a:effectRef idx="2">
-            <a:schemeClr val="accent1"/>
-          </a:effectRef>
-          <a:fontRef idx="minor">
-            <a:schemeClr val="lt1"/>
-          </a:fontRef>
-        </p:style>
-        <p:txBody>
-          <a:bodyPr rtlCol="0" anchor="ctr" lIns="0" rIns="0" tIns="0" bIns="0" wrap="square"/>
-          <a:lstStyle/>
-          <a:p>
-            <a:pPr algn="ctr"/>
-            <a:r>
-              <a:rPr sz="1300" b="1" i="0">
-                <a:solidFill>
-                  <a:srgbClr val="FFFFFF"/>
-                </a:solidFill>
-                <a:latin typeface="Arial"/>
-              </a:rPr>
-              <a:t>1</a:t>
-            </a:r>
-          </a:p>
-        </p:txBody>
-      </p:sp>
-      <p:sp>
-        <p:nvSpPr>
-          <p:cNvPr id="5" name="TextBox 4"/>
+              <a:t>To see the method work, you need a realistic place to run it.</a:t>
+            </a:r>
+          </a:p>
+        </p:txBody>
+      </p:sp>
+      <p:sp>
+        <p:nvSpPr>
+          <p:cNvPr id="4" name="TextBox 3"/>
           <p:cNvSpPr txBox="1"/>
           <p:nvPr/>
         </p:nvSpPr>
         <p:spPr>
           <a:xfrm>
-            <a:off x="1115568" y="1463040"/>
-            <a:ext cx="10527487" cy="813815"/>
+            <a:off x="1005840" y="3611880"/>
+            <a:ext cx="10149840" cy="2377440"/>
           </a:xfrm>
           <a:prstGeom prst="rect">
             <a:avLst/>
@@ -12673,682 +12117,40 @@
           <a:p>
             <a:pPr>
               <a:spcAft>
-                <a:spcPts val="300"/>
+                <a:spcPts val="800"/>
               </a:spcAft>
             </a:pPr>
             <a:r>
-              <a:rPr sz="1900" b="1" i="0">
-                <a:solidFill>
-                  <a:srgbClr val="1A1A1A"/>
-                </a:solidFill>
-                <a:latin typeface="Arial"/>
-              </a:rPr>
-              <a:t>Ministry of Education, Youth and Sport (MoEYS)</a:t>
-            </a:r>
-          </a:p>
-          <a:p>
-            <a:pPr>
-              <a:spcAft>
-                <a:spcPts val="300"/>
-              </a:spcAft>
-            </a:pPr>
-            <a:r>
-              <a:rPr sz="1550" b="0" i="0">
+              <a:rPr sz="1700" b="0" i="0">
                 <a:solidFill>
                   <a:srgbClr val="595959"/>
                 </a:solidFill>
                 <a:latin typeface="Arial"/>
               </a:rPr>
-              <a:t>Sets policy and funds schools. The policy unit.</a:t>
-            </a:r>
-          </a:p>
-        </p:txBody>
-      </p:sp>
-      <p:sp>
-        <p:nvSpPr>
-          <p:cNvPr id="6" name="Rectangle 5"/>
-          <p:cNvSpPr/>
-          <p:nvPr/>
-        </p:nvSpPr>
-        <p:spPr>
-          <a:xfrm>
-            <a:off x="621792" y="2281428"/>
-            <a:ext cx="10881360" cy="12700"/>
-          </a:xfrm>
-          <a:prstGeom prst="rect">
-            <a:avLst/>
-          </a:prstGeom>
-          <a:solidFill>
-            <a:srgbClr val="DDECF4"/>
-          </a:solidFill>
-          <a:ln>
-            <a:noFill/>
-          </a:ln>
-          <a:effectLst/>
-        </p:spPr>
-        <p:style>
-          <a:lnRef idx="1">
-            <a:schemeClr val="accent1"/>
-          </a:lnRef>
-          <a:fillRef idx="3">
-            <a:schemeClr val="accent1"/>
-          </a:fillRef>
-          <a:effectRef idx="2">
-            <a:schemeClr val="accent1"/>
-          </a:effectRef>
-          <a:fontRef idx="minor">
-            <a:schemeClr val="lt1"/>
-          </a:fontRef>
-        </p:style>
-        <p:txBody>
-          <a:bodyPr rtlCol="0" anchor="ctr"/>
-          <a:lstStyle/>
-          <a:p>
-            <a:pPr algn="ctr"/>
-          </a:p>
-        </p:txBody>
-      </p:sp>
-      <p:sp>
-        <p:nvSpPr>
-          <p:cNvPr id="7" name="Oval 6"/>
-          <p:cNvSpPr/>
-          <p:nvPr/>
-        </p:nvSpPr>
-        <p:spPr>
-          <a:xfrm>
-            <a:off x="621792" y="2368296"/>
-            <a:ext cx="310896" cy="310896"/>
-          </a:xfrm>
-          <a:prstGeom prst="ellipse">
-            <a:avLst/>
-          </a:prstGeom>
-          <a:solidFill>
-            <a:srgbClr val="009CD6"/>
-          </a:solidFill>
-          <a:ln>
-            <a:noFill/>
-          </a:ln>
-          <a:effectLst/>
-        </p:spPr>
-        <p:style>
-          <a:lnRef idx="1">
-            <a:schemeClr val="accent1"/>
-          </a:lnRef>
-          <a:fillRef idx="3">
-            <a:schemeClr val="accent1"/>
-          </a:fillRef>
-          <a:effectRef idx="2">
-            <a:schemeClr val="accent1"/>
-          </a:effectRef>
-          <a:fontRef idx="minor">
-            <a:schemeClr val="lt1"/>
-          </a:fontRef>
-        </p:style>
-        <p:txBody>
-          <a:bodyPr rtlCol="0" anchor="ctr" lIns="0" rIns="0" tIns="0" bIns="0" wrap="square"/>
-          <a:lstStyle/>
-          <a:p>
-            <a:pPr algn="ctr"/>
-            <a:r>
-              <a:rPr sz="1300" b="1" i="0">
-                <a:solidFill>
-                  <a:srgbClr val="FFFFFF"/>
-                </a:solidFill>
-                <a:latin typeface="Arial"/>
-              </a:rPr>
-              <a:t>2</a:t>
-            </a:r>
-          </a:p>
-        </p:txBody>
-      </p:sp>
-      <p:sp>
-        <p:nvSpPr>
-          <p:cNvPr id="8" name="TextBox 7"/>
-          <p:cNvSpPr txBox="1"/>
-          <p:nvPr/>
-        </p:nvSpPr>
-        <p:spPr>
-          <a:xfrm>
-            <a:off x="1115568" y="2322576"/>
-            <a:ext cx="10527487" cy="813815"/>
-          </a:xfrm>
-          <a:prstGeom prst="rect">
-            <a:avLst/>
-          </a:prstGeom>
-          <a:noFill/>
-        </p:spPr>
-        <p:txBody>
-          <a:bodyPr wrap="square">
-            <a:spAutoFit/>
-          </a:bodyPr>
-          <a:lstStyle/>
+              <a:t>Progressa — a demonstration country with an education sector like many across the continent.</a:t>
+            </a:r>
+          </a:p>
           <a:p>
             <a:pPr>
               <a:spcAft>
-                <a:spcPts val="300"/>
+                <a:spcPts val="800"/>
               </a:spcAft>
             </a:pPr>
             <a:r>
-              <a:rPr sz="1900" b="1" i="0">
-                <a:solidFill>
-                  <a:srgbClr val="1A1A1A"/>
-                </a:solidFill>
-                <a:latin typeface="Arial"/>
-              </a:rPr>
-              <a:t>National Examination Authority (PNEA)</a:t>
-            </a:r>
-          </a:p>
-          <a:p>
-            <a:pPr>
-              <a:spcAft>
-                <a:spcPts val="300"/>
-              </a:spcAft>
-            </a:pPr>
-            <a:r>
-              <a:rPr sz="1550" b="0" i="0">
+              <a:rPr sz="1700" b="0" i="0">
                 <a:solidFill>
                   <a:srgbClr val="595959"/>
                 </a:solidFill>
                 <a:latin typeface="Arial"/>
               </a:rPr>
-              <a:t>Runs examinations and certifies results. The service authority.</a:t>
-            </a:r>
-          </a:p>
-        </p:txBody>
-      </p:sp>
-      <p:sp>
-        <p:nvSpPr>
-          <p:cNvPr id="9" name="Rectangle 8"/>
-          <p:cNvSpPr/>
-          <p:nvPr/>
-        </p:nvSpPr>
-        <p:spPr>
-          <a:xfrm>
-            <a:off x="621792" y="3140963"/>
-            <a:ext cx="10881360" cy="12700"/>
-          </a:xfrm>
-          <a:prstGeom prst="rect">
-            <a:avLst/>
-          </a:prstGeom>
-          <a:solidFill>
-            <a:srgbClr val="DDECF4"/>
-          </a:solidFill>
-          <a:ln>
-            <a:noFill/>
-          </a:ln>
-          <a:effectLst/>
-        </p:spPr>
-        <p:style>
-          <a:lnRef idx="1">
-            <a:schemeClr val="accent1"/>
-          </a:lnRef>
-          <a:fillRef idx="3">
-            <a:schemeClr val="accent1"/>
-          </a:fillRef>
-          <a:effectRef idx="2">
-            <a:schemeClr val="accent1"/>
-          </a:effectRef>
-          <a:fontRef idx="minor">
-            <a:schemeClr val="lt1"/>
-          </a:fontRef>
-        </p:style>
-        <p:txBody>
-          <a:bodyPr rtlCol="0" anchor="ctr"/>
-          <a:lstStyle/>
-          <a:p>
-            <a:pPr algn="ctr"/>
-          </a:p>
-        </p:txBody>
-      </p:sp>
-      <p:sp>
-        <p:nvSpPr>
-          <p:cNvPr id="10" name="Oval 9"/>
-          <p:cNvSpPr/>
-          <p:nvPr/>
-        </p:nvSpPr>
-        <p:spPr>
-          <a:xfrm>
-            <a:off x="621792" y="3227831"/>
-            <a:ext cx="310896" cy="310896"/>
-          </a:xfrm>
-          <a:prstGeom prst="ellipse">
-            <a:avLst/>
-          </a:prstGeom>
-          <a:solidFill>
-            <a:srgbClr val="009CD6"/>
-          </a:solidFill>
-          <a:ln>
-            <a:noFill/>
-          </a:ln>
-          <a:effectLst/>
-        </p:spPr>
-        <p:style>
-          <a:lnRef idx="1">
-            <a:schemeClr val="accent1"/>
-          </a:lnRef>
-          <a:fillRef idx="3">
-            <a:schemeClr val="accent1"/>
-          </a:fillRef>
-          <a:effectRef idx="2">
-            <a:schemeClr val="accent1"/>
-          </a:effectRef>
-          <a:fontRef idx="minor">
-            <a:schemeClr val="lt1"/>
-          </a:fontRef>
-        </p:style>
-        <p:txBody>
-          <a:bodyPr rtlCol="0" anchor="ctr" lIns="0" rIns="0" tIns="0" bIns="0" wrap="square"/>
-          <a:lstStyle/>
-          <a:p>
-            <a:pPr algn="ctr"/>
-            <a:r>
-              <a:rPr sz="1300" b="1" i="0">
-                <a:solidFill>
-                  <a:srgbClr val="FFFFFF"/>
-                </a:solidFill>
-                <a:latin typeface="Arial"/>
-              </a:rPr>
-              <a:t>3</a:t>
-            </a:r>
-          </a:p>
-        </p:txBody>
-      </p:sp>
-      <p:sp>
-        <p:nvSpPr>
-          <p:cNvPr id="11" name="TextBox 10"/>
-          <p:cNvSpPr txBox="1"/>
-          <p:nvPr/>
-        </p:nvSpPr>
-        <p:spPr>
-          <a:xfrm>
-            <a:off x="1115568" y="3182111"/>
-            <a:ext cx="10527487" cy="813815"/>
-          </a:xfrm>
-          <a:prstGeom prst="rect">
-            <a:avLst/>
-          </a:prstGeom>
-          <a:noFill/>
-        </p:spPr>
-        <p:txBody>
-          <a:bodyPr wrap="square">
-            <a:spAutoFit/>
-          </a:bodyPr>
-          <a:lstStyle/>
-          <a:p>
-            <a:pPr>
-              <a:spcAft>
-                <a:spcPts val="300"/>
-              </a:spcAft>
-            </a:pPr>
-            <a:r>
-              <a:rPr sz="1900" b="1" i="0">
-                <a:solidFill>
-                  <a:srgbClr val="1A1A1A"/>
-                </a:solidFill>
-                <a:latin typeface="Arial"/>
-              </a:rPr>
-              <a:t>Learner Registry (PLR)</a:t>
-            </a:r>
-          </a:p>
-          <a:p>
-            <a:pPr>
-              <a:spcAft>
-                <a:spcPts val="300"/>
-              </a:spcAft>
-            </a:pPr>
-            <a:r>
-              <a:rPr sz="1550" b="0" i="0">
-                <a:solidFill>
-                  <a:srgbClr val="595959"/>
-                </a:solidFill>
-                <a:latin typeface="Arial"/>
-              </a:rPr>
-              <a:t>Meant to be the one list of who is a learner.</a:t>
-            </a:r>
-          </a:p>
-        </p:txBody>
-      </p:sp>
-      <p:sp>
-        <p:nvSpPr>
-          <p:cNvPr id="12" name="Rectangle 11"/>
-          <p:cNvSpPr/>
-          <p:nvPr/>
-        </p:nvSpPr>
-        <p:spPr>
-          <a:xfrm>
-            <a:off x="621792" y="4000500"/>
-            <a:ext cx="10881360" cy="12700"/>
-          </a:xfrm>
-          <a:prstGeom prst="rect">
-            <a:avLst/>
-          </a:prstGeom>
-          <a:solidFill>
-            <a:srgbClr val="DDECF4"/>
-          </a:solidFill>
-          <a:ln>
-            <a:noFill/>
-          </a:ln>
-          <a:effectLst/>
-        </p:spPr>
-        <p:style>
-          <a:lnRef idx="1">
-            <a:schemeClr val="accent1"/>
-          </a:lnRef>
-          <a:fillRef idx="3">
-            <a:schemeClr val="accent1"/>
-          </a:fillRef>
-          <a:effectRef idx="2">
-            <a:schemeClr val="accent1"/>
-          </a:effectRef>
-          <a:fontRef idx="minor">
-            <a:schemeClr val="lt1"/>
-          </a:fontRef>
-        </p:style>
-        <p:txBody>
-          <a:bodyPr rtlCol="0" anchor="ctr"/>
-          <a:lstStyle/>
-          <a:p>
-            <a:pPr algn="ctr"/>
-          </a:p>
-        </p:txBody>
-      </p:sp>
-      <p:sp>
-        <p:nvSpPr>
-          <p:cNvPr id="13" name="Oval 12"/>
-          <p:cNvSpPr/>
-          <p:nvPr/>
-        </p:nvSpPr>
-        <p:spPr>
-          <a:xfrm>
-            <a:off x="621792" y="4087368"/>
-            <a:ext cx="310896" cy="310896"/>
-          </a:xfrm>
-          <a:prstGeom prst="ellipse">
-            <a:avLst/>
-          </a:prstGeom>
-          <a:solidFill>
-            <a:srgbClr val="009CD6"/>
-          </a:solidFill>
-          <a:ln>
-            <a:noFill/>
-          </a:ln>
-          <a:effectLst/>
-        </p:spPr>
-        <p:style>
-          <a:lnRef idx="1">
-            <a:schemeClr val="accent1"/>
-          </a:lnRef>
-          <a:fillRef idx="3">
-            <a:schemeClr val="accent1"/>
-          </a:fillRef>
-          <a:effectRef idx="2">
-            <a:schemeClr val="accent1"/>
-          </a:effectRef>
-          <a:fontRef idx="minor">
-            <a:schemeClr val="lt1"/>
-          </a:fontRef>
-        </p:style>
-        <p:txBody>
-          <a:bodyPr rtlCol="0" anchor="ctr" lIns="0" rIns="0" tIns="0" bIns="0" wrap="square"/>
-          <a:lstStyle/>
-          <a:p>
-            <a:pPr algn="ctr"/>
-            <a:r>
-              <a:rPr sz="1300" b="1" i="0">
-                <a:solidFill>
-                  <a:srgbClr val="FFFFFF"/>
-                </a:solidFill>
-                <a:latin typeface="Arial"/>
-              </a:rPr>
-              <a:t>4</a:t>
-            </a:r>
-          </a:p>
-        </p:txBody>
-      </p:sp>
-      <p:sp>
-        <p:nvSpPr>
-          <p:cNvPr id="14" name="TextBox 13"/>
-          <p:cNvSpPr txBox="1"/>
-          <p:nvPr/>
-        </p:nvSpPr>
-        <p:spPr>
-          <a:xfrm>
-            <a:off x="1115568" y="4041648"/>
-            <a:ext cx="10527487" cy="813815"/>
-          </a:xfrm>
-          <a:prstGeom prst="rect">
-            <a:avLst/>
-          </a:prstGeom>
-          <a:noFill/>
-        </p:spPr>
-        <p:txBody>
-          <a:bodyPr wrap="square">
-            <a:spAutoFit/>
-          </a:bodyPr>
-          <a:lstStyle/>
-          <a:p>
-            <a:pPr>
-              <a:spcAft>
-                <a:spcPts val="300"/>
-              </a:spcAft>
-            </a:pPr>
-            <a:r>
-              <a:rPr sz="1900" b="1" i="0">
-                <a:solidFill>
-                  <a:srgbClr val="1A1A1A"/>
-                </a:solidFill>
-                <a:latin typeface="Arial"/>
-              </a:rPr>
-              <a:t>National Identity Authority (PNIA)</a:t>
-            </a:r>
-          </a:p>
-          <a:p>
-            <a:pPr>
-              <a:spcAft>
-                <a:spcPts val="300"/>
-              </a:spcAft>
-            </a:pPr>
-            <a:r>
-              <a:rPr sz="1550" b="0" i="0">
-                <a:solidFill>
-                  <a:srgbClr val="595959"/>
-                </a:solidFill>
-                <a:latin typeface="Arial"/>
-              </a:rPr>
-              <a:t>Owns the person identity every sector reuses.</a:t>
-            </a:r>
-          </a:p>
-        </p:txBody>
-      </p:sp>
-      <p:sp>
-        <p:nvSpPr>
-          <p:cNvPr id="15" name="Rectangle 14"/>
-          <p:cNvSpPr/>
-          <p:nvPr/>
-        </p:nvSpPr>
-        <p:spPr>
-          <a:xfrm>
-            <a:off x="621792" y="4860036"/>
-            <a:ext cx="10881360" cy="12700"/>
-          </a:xfrm>
-          <a:prstGeom prst="rect">
-            <a:avLst/>
-          </a:prstGeom>
-          <a:solidFill>
-            <a:srgbClr val="DDECF4"/>
-          </a:solidFill>
-          <a:ln>
-            <a:noFill/>
-          </a:ln>
-          <a:effectLst/>
-        </p:spPr>
-        <p:style>
-          <a:lnRef idx="1">
-            <a:schemeClr val="accent1"/>
-          </a:lnRef>
-          <a:fillRef idx="3">
-            <a:schemeClr val="accent1"/>
-          </a:fillRef>
-          <a:effectRef idx="2">
-            <a:schemeClr val="accent1"/>
-          </a:effectRef>
-          <a:fontRef idx="minor">
-            <a:schemeClr val="lt1"/>
-          </a:fontRef>
-        </p:style>
-        <p:txBody>
-          <a:bodyPr rtlCol="0" anchor="ctr"/>
-          <a:lstStyle/>
-          <a:p>
-            <a:pPr algn="ctr"/>
-          </a:p>
-        </p:txBody>
-      </p:sp>
-      <p:sp>
-        <p:nvSpPr>
-          <p:cNvPr id="16" name="Oval 15"/>
-          <p:cNvSpPr/>
-          <p:nvPr/>
-        </p:nvSpPr>
-        <p:spPr>
-          <a:xfrm>
-            <a:off x="621792" y="4946903"/>
-            <a:ext cx="310896" cy="310896"/>
-          </a:xfrm>
-          <a:prstGeom prst="ellipse">
-            <a:avLst/>
-          </a:prstGeom>
-          <a:solidFill>
-            <a:srgbClr val="009CD6"/>
-          </a:solidFill>
-          <a:ln>
-            <a:noFill/>
-          </a:ln>
-          <a:effectLst/>
-        </p:spPr>
-        <p:style>
-          <a:lnRef idx="1">
-            <a:schemeClr val="accent1"/>
-          </a:lnRef>
-          <a:fillRef idx="3">
-            <a:schemeClr val="accent1"/>
-          </a:fillRef>
-          <a:effectRef idx="2">
-            <a:schemeClr val="accent1"/>
-          </a:effectRef>
-          <a:fontRef idx="minor">
-            <a:schemeClr val="lt1"/>
-          </a:fontRef>
-        </p:style>
-        <p:txBody>
-          <a:bodyPr rtlCol="0" anchor="ctr" lIns="0" rIns="0" tIns="0" bIns="0" wrap="square"/>
-          <a:lstStyle/>
-          <a:p>
-            <a:pPr algn="ctr"/>
-            <a:r>
-              <a:rPr sz="1300" b="1" i="0">
-                <a:solidFill>
-                  <a:srgbClr val="FFFFFF"/>
-                </a:solidFill>
-                <a:latin typeface="Arial"/>
-              </a:rPr>
-              <a:t>5</a:t>
-            </a:r>
-          </a:p>
-        </p:txBody>
-      </p:sp>
-      <p:sp>
-        <p:nvSpPr>
-          <p:cNvPr id="17" name="TextBox 16"/>
-          <p:cNvSpPr txBox="1"/>
-          <p:nvPr/>
-        </p:nvSpPr>
-        <p:spPr>
-          <a:xfrm>
-            <a:off x="1115568" y="4901183"/>
-            <a:ext cx="10527487" cy="813815"/>
-          </a:xfrm>
-          <a:prstGeom prst="rect">
-            <a:avLst/>
-          </a:prstGeom>
-          <a:noFill/>
-        </p:spPr>
-        <p:txBody>
-          <a:bodyPr wrap="square">
-            <a:spAutoFit/>
-          </a:bodyPr>
-          <a:lstStyle/>
-          <a:p>
-            <a:pPr>
-              <a:spcAft>
-                <a:spcPts val="300"/>
-              </a:spcAft>
-            </a:pPr>
-            <a:r>
-              <a:rPr sz="1900" b="1" i="0">
-                <a:solidFill>
-                  <a:srgbClr val="1A1A1A"/>
-                </a:solidFill>
-                <a:latin typeface="Arial"/>
-              </a:rPr>
-              <a:t>Digital Government Authority (PDGA)</a:t>
-            </a:r>
-          </a:p>
-          <a:p>
-            <a:pPr>
-              <a:spcAft>
-                <a:spcPts val="300"/>
-              </a:spcAft>
-            </a:pPr>
-            <a:r>
-              <a:rPr sz="1550" b="0" i="0">
-                <a:solidFill>
-                  <a:srgbClr val="595959"/>
-                </a:solidFill>
-                <a:latin typeface="Arial"/>
-              </a:rPr>
-              <a:t>Runs the shared data-exchange backbone and payments.</a:t>
-            </a:r>
-          </a:p>
-        </p:txBody>
-      </p:sp>
-      <p:sp>
-        <p:nvSpPr>
-          <p:cNvPr id="18" name="TextBox 17"/>
-          <p:cNvSpPr txBox="1"/>
-          <p:nvPr/>
-        </p:nvSpPr>
-        <p:spPr>
-          <a:xfrm>
-            <a:off x="658368" y="5870448"/>
-            <a:ext cx="10881360" cy="548640"/>
-          </a:xfrm>
-          <a:prstGeom prst="rect">
-            <a:avLst/>
-          </a:prstGeom>
-          <a:noFill/>
-        </p:spPr>
-        <p:txBody>
-          <a:bodyPr wrap="square">
-            <a:spAutoFit/>
-          </a:bodyPr>
-          <a:lstStyle/>
-          <a:p>
-            <a:r>
-              <a:rPr sz="1550" b="1" i="0">
-                <a:solidFill>
-                  <a:srgbClr val="006E96"/>
-                </a:solidFill>
-                <a:latin typeface="Arial"/>
-              </a:rPr>
-              <a:t>Two registries — and neither is the undisputed owner of the learner.</a:t>
-            </a:r>
-          </a:p>
-        </p:txBody>
-      </p:sp>
-      <p:sp>
-        <p:nvSpPr>
-          <p:cNvPr id="19" name="TextBox 18"/>
+              <a:t>Real institutions. A real fragmentation problem. A minister who wants results.</a:t>
+            </a:r>
+          </a:p>
+        </p:txBody>
+      </p:sp>
+      <p:sp>
+        <p:nvSpPr>
+          <p:cNvPr id="5" name="TextBox 4"/>
           <p:cNvSpPr txBox="1"/>
           <p:nvPr/>
         </p:nvSpPr>
@@ -13376,6 +12178,41 @@
                 <a:latin typeface="Arial"/>
               </a:rPr>
               <a:t>4.1 · Meet Progressa — a real sector with a real fragmentation problem</a:t>
+            </a:r>
+          </a:p>
+        </p:txBody>
+      </p:sp>
+      <p:sp>
+        <p:nvSpPr>
+          <p:cNvPr id="6" name="TextBox 5"/>
+          <p:cNvSpPr txBox="1"/>
+          <p:nvPr/>
+        </p:nvSpPr>
+        <p:spPr>
+          <a:xfrm>
+            <a:off x="10058400" y="6473952"/>
+            <a:ext cx="1673352" cy="292608"/>
+          </a:xfrm>
+          <a:prstGeom prst="rect">
+            <a:avLst/>
+          </a:prstGeom>
+          <a:noFill/>
+        </p:spPr>
+        <p:txBody>
+          <a:bodyPr wrap="square">
+            <a:spAutoFit/>
+          </a:bodyPr>
+          <a:lstStyle/>
+          <a:p>
+            <a:pPr algn="r"/>
+            <a:r>
+              <a:rPr sz="900" b="0" i="0">
+                <a:solidFill>
+                  <a:srgbClr val="595959"/>
+                </a:solidFill>
+                <a:latin typeface="Arial"/>
+              </a:rPr>
+              <a:t>www.itu.int</a:t>
             </a:r>
           </a:p>
         </p:txBody>
@@ -13471,84 +12308,27 @@
                 </a:solidFill>
                 <a:latin typeface="Arial"/>
               </a:rPr>
-              <a:t>One learner, three registrations, and the three lists do not agree</a:t>
-            </a:r>
-          </a:p>
-        </p:txBody>
-      </p:sp>
-      <p:sp>
-        <p:nvSpPr>
-          <p:cNvPr id="4" name="TextBox 3"/>
-          <p:cNvSpPr txBox="1"/>
+              <a:t>Five bodies: a policy unit, a service authority, two registries, a platform</a:t>
+            </a:r>
+          </a:p>
+        </p:txBody>
+      </p:sp>
+      <p:sp>
+        <p:nvSpPr>
+          <p:cNvPr id="4" name="Oval 3"/>
+          <p:cNvSpPr/>
           <p:nvPr/>
         </p:nvSpPr>
         <p:spPr>
           <a:xfrm>
-            <a:off x="658368" y="1600200"/>
-            <a:ext cx="10881360" cy="2651760"/>
-          </a:xfrm>
-          <a:prstGeom prst="rect">
+            <a:off x="621792" y="1508760"/>
+            <a:ext cx="310896" cy="310896"/>
+          </a:xfrm>
+          <a:prstGeom prst="ellipse">
             <a:avLst/>
           </a:prstGeom>
-          <a:noFill/>
-        </p:spPr>
-        <p:txBody>
-          <a:bodyPr wrap="square">
-            <a:spAutoFit/>
-          </a:bodyPr>
-          <a:lstStyle/>
-          <a:p>
-            <a:pPr>
-              <a:spcAft>
-                <a:spcPts val="1200"/>
-              </a:spcAft>
-            </a:pPr>
-            <a:r>
-              <a:rPr sz="2000" b="0" i="0">
-                <a:solidFill>
-                  <a:srgbClr val="1A1A1A"/>
-                </a:solidFill>
-                <a:latin typeface="Arial"/>
-              </a:rPr>
-              <a:t>A learner is registered three times — once in the school census, once by the Examination Authority for exams, once by a social grant programme. None of the three lists agree.</a:t>
-            </a:r>
-          </a:p>
-          <a:p>
-            <a:pPr>
-              <a:spcAft>
-                <a:spcPts val="1200"/>
-              </a:spcAft>
-            </a:pPr>
-            <a:r>
-              <a:rPr sz="2000" b="0" i="0">
-                <a:solidFill>
-                  <a:srgbClr val="1A1A1A"/>
-                </a:solidFill>
-                <a:latin typeface="Arial"/>
-              </a:rPr>
-              <a:t>A parent proves the child's identity on paper at every counter, because no system trusts another's. The minister has promised a single learner record that follows the child from primary school to university — and it cannot be delivered, because the systems do not fit together.</a:t>
-            </a:r>
-          </a:p>
-        </p:txBody>
-      </p:sp>
-      <p:sp>
-        <p:nvSpPr>
-          <p:cNvPr id="5" name="Rounded Rectangle 4"/>
-          <p:cNvSpPr/>
-          <p:nvPr/>
-        </p:nvSpPr>
-        <p:spPr>
-          <a:xfrm>
-            <a:off x="658368" y="4434840"/>
-            <a:ext cx="10881360" cy="1325880"/>
-          </a:xfrm>
-          <a:prstGeom prst="roundRect">
-            <a:avLst>
-              <a:gd name="adj" fmla="val 4500"/>
-            </a:avLst>
-          </a:prstGeom>
           <a:solidFill>
-            <a:srgbClr val="E5F5FB"/>
+            <a:srgbClr val="009CD6"/>
           </a:solidFill>
           <a:ln>
             <a:noFill/>
@@ -13570,23 +12350,32 @@
           </a:fontRef>
         </p:style>
         <p:txBody>
-          <a:bodyPr rtlCol="0" anchor="ctr"/>
+          <a:bodyPr rtlCol="0" anchor="ctr" lIns="0" rIns="0" tIns="0" bIns="0" wrap="square"/>
           <a:lstStyle/>
           <a:p>
             <a:pPr algn="ctr"/>
-          </a:p>
-        </p:txBody>
-      </p:sp>
-      <p:sp>
-        <p:nvSpPr>
-          <p:cNvPr id="6" name="TextBox 5"/>
+            <a:r>
+              <a:rPr sz="1300" b="1" i="0">
+                <a:solidFill>
+                  <a:srgbClr val="FFFFFF"/>
+                </a:solidFill>
+                <a:latin typeface="Arial"/>
+              </a:rPr>
+              <a:t>1</a:t>
+            </a:r>
+          </a:p>
+        </p:txBody>
+      </p:sp>
+      <p:sp>
+        <p:nvSpPr>
+          <p:cNvPr id="5" name="TextBox 4"/>
           <p:cNvSpPr txBox="1"/>
           <p:nvPr/>
         </p:nvSpPr>
         <p:spPr>
           <a:xfrm>
-            <a:off x="859536" y="4626864"/>
-            <a:ext cx="10479024" cy="1051560"/>
+            <a:off x="1115568" y="1463040"/>
+            <a:ext cx="10527487" cy="813815"/>
           </a:xfrm>
           <a:prstGeom prst="rect">
             <a:avLst/>
@@ -13601,24 +12390,682 @@
           <a:p>
             <a:pPr>
               <a:spcAft>
-                <a:spcPts val="700"/>
+                <a:spcPts val="300"/>
               </a:spcAft>
             </a:pPr>
             <a:r>
-              <a:rPr sz="2300" b="1" i="0">
+              <a:rPr sz="1900" b="1" i="0">
+                <a:solidFill>
+                  <a:srgbClr val="1A1A1A"/>
+                </a:solidFill>
+                <a:latin typeface="Arial"/>
+              </a:rPr>
+              <a:t>Ministry of Education, Youth and Sport (MoEYS)</a:t>
+            </a:r>
+          </a:p>
+          <a:p>
+            <a:pPr>
+              <a:spcAft>
+                <a:spcPts val="300"/>
+              </a:spcAft>
+            </a:pPr>
+            <a:r>
+              <a:rPr sz="1550" b="0" i="0">
+                <a:solidFill>
+                  <a:srgbClr val="595959"/>
+                </a:solidFill>
+                <a:latin typeface="Arial"/>
+              </a:rPr>
+              <a:t>Sets policy and funds schools. The policy unit.</a:t>
+            </a:r>
+          </a:p>
+        </p:txBody>
+      </p:sp>
+      <p:sp>
+        <p:nvSpPr>
+          <p:cNvPr id="6" name="Rectangle 5"/>
+          <p:cNvSpPr/>
+          <p:nvPr/>
+        </p:nvSpPr>
+        <p:spPr>
+          <a:xfrm>
+            <a:off x="621792" y="2281428"/>
+            <a:ext cx="10881360" cy="12700"/>
+          </a:xfrm>
+          <a:prstGeom prst="rect">
+            <a:avLst/>
+          </a:prstGeom>
+          <a:solidFill>
+            <a:srgbClr val="DDECF4"/>
+          </a:solidFill>
+          <a:ln>
+            <a:noFill/>
+          </a:ln>
+          <a:effectLst/>
+        </p:spPr>
+        <p:style>
+          <a:lnRef idx="1">
+            <a:schemeClr val="accent1"/>
+          </a:lnRef>
+          <a:fillRef idx="3">
+            <a:schemeClr val="accent1"/>
+          </a:fillRef>
+          <a:effectRef idx="2">
+            <a:schemeClr val="accent1"/>
+          </a:effectRef>
+          <a:fontRef idx="minor">
+            <a:schemeClr val="lt1"/>
+          </a:fontRef>
+        </p:style>
+        <p:txBody>
+          <a:bodyPr rtlCol="0" anchor="ctr"/>
+          <a:lstStyle/>
+          <a:p>
+            <a:pPr algn="ctr"/>
+          </a:p>
+        </p:txBody>
+      </p:sp>
+      <p:sp>
+        <p:nvSpPr>
+          <p:cNvPr id="7" name="Oval 6"/>
+          <p:cNvSpPr/>
+          <p:nvPr/>
+        </p:nvSpPr>
+        <p:spPr>
+          <a:xfrm>
+            <a:off x="621792" y="2368296"/>
+            <a:ext cx="310896" cy="310896"/>
+          </a:xfrm>
+          <a:prstGeom prst="ellipse">
+            <a:avLst/>
+          </a:prstGeom>
+          <a:solidFill>
+            <a:srgbClr val="009CD6"/>
+          </a:solidFill>
+          <a:ln>
+            <a:noFill/>
+          </a:ln>
+          <a:effectLst/>
+        </p:spPr>
+        <p:style>
+          <a:lnRef idx="1">
+            <a:schemeClr val="accent1"/>
+          </a:lnRef>
+          <a:fillRef idx="3">
+            <a:schemeClr val="accent1"/>
+          </a:fillRef>
+          <a:effectRef idx="2">
+            <a:schemeClr val="accent1"/>
+          </a:effectRef>
+          <a:fontRef idx="minor">
+            <a:schemeClr val="lt1"/>
+          </a:fontRef>
+        </p:style>
+        <p:txBody>
+          <a:bodyPr rtlCol="0" anchor="ctr" lIns="0" rIns="0" tIns="0" bIns="0" wrap="square"/>
+          <a:lstStyle/>
+          <a:p>
+            <a:pPr algn="ctr"/>
+            <a:r>
+              <a:rPr sz="1300" b="1" i="0">
+                <a:solidFill>
+                  <a:srgbClr val="FFFFFF"/>
+                </a:solidFill>
+                <a:latin typeface="Arial"/>
+              </a:rPr>
+              <a:t>2</a:t>
+            </a:r>
+          </a:p>
+        </p:txBody>
+      </p:sp>
+      <p:sp>
+        <p:nvSpPr>
+          <p:cNvPr id="8" name="TextBox 7"/>
+          <p:cNvSpPr txBox="1"/>
+          <p:nvPr/>
+        </p:nvSpPr>
+        <p:spPr>
+          <a:xfrm>
+            <a:off x="1115568" y="2322576"/>
+            <a:ext cx="10527487" cy="813815"/>
+          </a:xfrm>
+          <a:prstGeom prst="rect">
+            <a:avLst/>
+          </a:prstGeom>
+          <a:noFill/>
+        </p:spPr>
+        <p:txBody>
+          <a:bodyPr wrap="square">
+            <a:spAutoFit/>
+          </a:bodyPr>
+          <a:lstStyle/>
+          <a:p>
+            <a:pPr>
+              <a:spcAft>
+                <a:spcPts val="300"/>
+              </a:spcAft>
+            </a:pPr>
+            <a:r>
+              <a:rPr sz="1900" b="1" i="0">
+                <a:solidFill>
+                  <a:srgbClr val="1A1A1A"/>
+                </a:solidFill>
+                <a:latin typeface="Arial"/>
+              </a:rPr>
+              <a:t>National Examination Authority (PNEA)</a:t>
+            </a:r>
+          </a:p>
+          <a:p>
+            <a:pPr>
+              <a:spcAft>
+                <a:spcPts val="300"/>
+              </a:spcAft>
+            </a:pPr>
+            <a:r>
+              <a:rPr sz="1550" b="0" i="0">
+                <a:solidFill>
+                  <a:srgbClr val="595959"/>
+                </a:solidFill>
+                <a:latin typeface="Arial"/>
+              </a:rPr>
+              <a:t>Runs examinations and certifies results. The service authority.</a:t>
+            </a:r>
+          </a:p>
+        </p:txBody>
+      </p:sp>
+      <p:sp>
+        <p:nvSpPr>
+          <p:cNvPr id="9" name="Rectangle 8"/>
+          <p:cNvSpPr/>
+          <p:nvPr/>
+        </p:nvSpPr>
+        <p:spPr>
+          <a:xfrm>
+            <a:off x="621792" y="3140963"/>
+            <a:ext cx="10881360" cy="12700"/>
+          </a:xfrm>
+          <a:prstGeom prst="rect">
+            <a:avLst/>
+          </a:prstGeom>
+          <a:solidFill>
+            <a:srgbClr val="DDECF4"/>
+          </a:solidFill>
+          <a:ln>
+            <a:noFill/>
+          </a:ln>
+          <a:effectLst/>
+        </p:spPr>
+        <p:style>
+          <a:lnRef idx="1">
+            <a:schemeClr val="accent1"/>
+          </a:lnRef>
+          <a:fillRef idx="3">
+            <a:schemeClr val="accent1"/>
+          </a:fillRef>
+          <a:effectRef idx="2">
+            <a:schemeClr val="accent1"/>
+          </a:effectRef>
+          <a:fontRef idx="minor">
+            <a:schemeClr val="lt1"/>
+          </a:fontRef>
+        </p:style>
+        <p:txBody>
+          <a:bodyPr rtlCol="0" anchor="ctr"/>
+          <a:lstStyle/>
+          <a:p>
+            <a:pPr algn="ctr"/>
+          </a:p>
+        </p:txBody>
+      </p:sp>
+      <p:sp>
+        <p:nvSpPr>
+          <p:cNvPr id="10" name="Oval 9"/>
+          <p:cNvSpPr/>
+          <p:nvPr/>
+        </p:nvSpPr>
+        <p:spPr>
+          <a:xfrm>
+            <a:off x="621792" y="3227831"/>
+            <a:ext cx="310896" cy="310896"/>
+          </a:xfrm>
+          <a:prstGeom prst="ellipse">
+            <a:avLst/>
+          </a:prstGeom>
+          <a:solidFill>
+            <a:srgbClr val="009CD6"/>
+          </a:solidFill>
+          <a:ln>
+            <a:noFill/>
+          </a:ln>
+          <a:effectLst/>
+        </p:spPr>
+        <p:style>
+          <a:lnRef idx="1">
+            <a:schemeClr val="accent1"/>
+          </a:lnRef>
+          <a:fillRef idx="3">
+            <a:schemeClr val="accent1"/>
+          </a:fillRef>
+          <a:effectRef idx="2">
+            <a:schemeClr val="accent1"/>
+          </a:effectRef>
+          <a:fontRef idx="minor">
+            <a:schemeClr val="lt1"/>
+          </a:fontRef>
+        </p:style>
+        <p:txBody>
+          <a:bodyPr rtlCol="0" anchor="ctr" lIns="0" rIns="0" tIns="0" bIns="0" wrap="square"/>
+          <a:lstStyle/>
+          <a:p>
+            <a:pPr algn="ctr"/>
+            <a:r>
+              <a:rPr sz="1300" b="1" i="0">
+                <a:solidFill>
+                  <a:srgbClr val="FFFFFF"/>
+                </a:solidFill>
+                <a:latin typeface="Arial"/>
+              </a:rPr>
+              <a:t>3</a:t>
+            </a:r>
+          </a:p>
+        </p:txBody>
+      </p:sp>
+      <p:sp>
+        <p:nvSpPr>
+          <p:cNvPr id="11" name="TextBox 10"/>
+          <p:cNvSpPr txBox="1"/>
+          <p:nvPr/>
+        </p:nvSpPr>
+        <p:spPr>
+          <a:xfrm>
+            <a:off x="1115568" y="3182111"/>
+            <a:ext cx="10527487" cy="813815"/>
+          </a:xfrm>
+          <a:prstGeom prst="rect">
+            <a:avLst/>
+          </a:prstGeom>
+          <a:noFill/>
+        </p:spPr>
+        <p:txBody>
+          <a:bodyPr wrap="square">
+            <a:spAutoFit/>
+          </a:bodyPr>
+          <a:lstStyle/>
+          <a:p>
+            <a:pPr>
+              <a:spcAft>
+                <a:spcPts val="300"/>
+              </a:spcAft>
+            </a:pPr>
+            <a:r>
+              <a:rPr sz="1900" b="1" i="0">
+                <a:solidFill>
+                  <a:srgbClr val="1A1A1A"/>
+                </a:solidFill>
+                <a:latin typeface="Arial"/>
+              </a:rPr>
+              <a:t>Learner Registry (PLR)</a:t>
+            </a:r>
+          </a:p>
+          <a:p>
+            <a:pPr>
+              <a:spcAft>
+                <a:spcPts val="300"/>
+              </a:spcAft>
+            </a:pPr>
+            <a:r>
+              <a:rPr sz="1550" b="0" i="0">
+                <a:solidFill>
+                  <a:srgbClr val="595959"/>
+                </a:solidFill>
+                <a:latin typeface="Arial"/>
+              </a:rPr>
+              <a:t>Meant to be the one list of who is a learner.</a:t>
+            </a:r>
+          </a:p>
+        </p:txBody>
+      </p:sp>
+      <p:sp>
+        <p:nvSpPr>
+          <p:cNvPr id="12" name="Rectangle 11"/>
+          <p:cNvSpPr/>
+          <p:nvPr/>
+        </p:nvSpPr>
+        <p:spPr>
+          <a:xfrm>
+            <a:off x="621792" y="4000500"/>
+            <a:ext cx="10881360" cy="12700"/>
+          </a:xfrm>
+          <a:prstGeom prst="rect">
+            <a:avLst/>
+          </a:prstGeom>
+          <a:solidFill>
+            <a:srgbClr val="DDECF4"/>
+          </a:solidFill>
+          <a:ln>
+            <a:noFill/>
+          </a:ln>
+          <a:effectLst/>
+        </p:spPr>
+        <p:style>
+          <a:lnRef idx="1">
+            <a:schemeClr val="accent1"/>
+          </a:lnRef>
+          <a:fillRef idx="3">
+            <a:schemeClr val="accent1"/>
+          </a:fillRef>
+          <a:effectRef idx="2">
+            <a:schemeClr val="accent1"/>
+          </a:effectRef>
+          <a:fontRef idx="minor">
+            <a:schemeClr val="lt1"/>
+          </a:fontRef>
+        </p:style>
+        <p:txBody>
+          <a:bodyPr rtlCol="0" anchor="ctr"/>
+          <a:lstStyle/>
+          <a:p>
+            <a:pPr algn="ctr"/>
+          </a:p>
+        </p:txBody>
+      </p:sp>
+      <p:sp>
+        <p:nvSpPr>
+          <p:cNvPr id="13" name="Oval 12"/>
+          <p:cNvSpPr/>
+          <p:nvPr/>
+        </p:nvSpPr>
+        <p:spPr>
+          <a:xfrm>
+            <a:off x="621792" y="4087368"/>
+            <a:ext cx="310896" cy="310896"/>
+          </a:xfrm>
+          <a:prstGeom prst="ellipse">
+            <a:avLst/>
+          </a:prstGeom>
+          <a:solidFill>
+            <a:srgbClr val="009CD6"/>
+          </a:solidFill>
+          <a:ln>
+            <a:noFill/>
+          </a:ln>
+          <a:effectLst/>
+        </p:spPr>
+        <p:style>
+          <a:lnRef idx="1">
+            <a:schemeClr val="accent1"/>
+          </a:lnRef>
+          <a:fillRef idx="3">
+            <a:schemeClr val="accent1"/>
+          </a:fillRef>
+          <a:effectRef idx="2">
+            <a:schemeClr val="accent1"/>
+          </a:effectRef>
+          <a:fontRef idx="minor">
+            <a:schemeClr val="lt1"/>
+          </a:fontRef>
+        </p:style>
+        <p:txBody>
+          <a:bodyPr rtlCol="0" anchor="ctr" lIns="0" rIns="0" tIns="0" bIns="0" wrap="square"/>
+          <a:lstStyle/>
+          <a:p>
+            <a:pPr algn="ctr"/>
+            <a:r>
+              <a:rPr sz="1300" b="1" i="0">
+                <a:solidFill>
+                  <a:srgbClr val="FFFFFF"/>
+                </a:solidFill>
+                <a:latin typeface="Arial"/>
+              </a:rPr>
+              <a:t>4</a:t>
+            </a:r>
+          </a:p>
+        </p:txBody>
+      </p:sp>
+      <p:sp>
+        <p:nvSpPr>
+          <p:cNvPr id="14" name="TextBox 13"/>
+          <p:cNvSpPr txBox="1"/>
+          <p:nvPr/>
+        </p:nvSpPr>
+        <p:spPr>
+          <a:xfrm>
+            <a:off x="1115568" y="4041648"/>
+            <a:ext cx="10527487" cy="813815"/>
+          </a:xfrm>
+          <a:prstGeom prst="rect">
+            <a:avLst/>
+          </a:prstGeom>
+          <a:noFill/>
+        </p:spPr>
+        <p:txBody>
+          <a:bodyPr wrap="square">
+            <a:spAutoFit/>
+          </a:bodyPr>
+          <a:lstStyle/>
+          <a:p>
+            <a:pPr>
+              <a:spcAft>
+                <a:spcPts val="300"/>
+              </a:spcAft>
+            </a:pPr>
+            <a:r>
+              <a:rPr sz="1900" b="1" i="0">
+                <a:solidFill>
+                  <a:srgbClr val="1A1A1A"/>
+                </a:solidFill>
+                <a:latin typeface="Arial"/>
+              </a:rPr>
+              <a:t>National Identity Authority (PNIA)</a:t>
+            </a:r>
+          </a:p>
+          <a:p>
+            <a:pPr>
+              <a:spcAft>
+                <a:spcPts val="300"/>
+              </a:spcAft>
+            </a:pPr>
+            <a:r>
+              <a:rPr sz="1550" b="0" i="0">
+                <a:solidFill>
+                  <a:srgbClr val="595959"/>
+                </a:solidFill>
+                <a:latin typeface="Arial"/>
+              </a:rPr>
+              <a:t>Owns the person identity every sector reuses.</a:t>
+            </a:r>
+          </a:p>
+        </p:txBody>
+      </p:sp>
+      <p:sp>
+        <p:nvSpPr>
+          <p:cNvPr id="15" name="Rectangle 14"/>
+          <p:cNvSpPr/>
+          <p:nvPr/>
+        </p:nvSpPr>
+        <p:spPr>
+          <a:xfrm>
+            <a:off x="621792" y="4860036"/>
+            <a:ext cx="10881360" cy="12700"/>
+          </a:xfrm>
+          <a:prstGeom prst="rect">
+            <a:avLst/>
+          </a:prstGeom>
+          <a:solidFill>
+            <a:srgbClr val="DDECF4"/>
+          </a:solidFill>
+          <a:ln>
+            <a:noFill/>
+          </a:ln>
+          <a:effectLst/>
+        </p:spPr>
+        <p:style>
+          <a:lnRef idx="1">
+            <a:schemeClr val="accent1"/>
+          </a:lnRef>
+          <a:fillRef idx="3">
+            <a:schemeClr val="accent1"/>
+          </a:fillRef>
+          <a:effectRef idx="2">
+            <a:schemeClr val="accent1"/>
+          </a:effectRef>
+          <a:fontRef idx="minor">
+            <a:schemeClr val="lt1"/>
+          </a:fontRef>
+        </p:style>
+        <p:txBody>
+          <a:bodyPr rtlCol="0" anchor="ctr"/>
+          <a:lstStyle/>
+          <a:p>
+            <a:pPr algn="ctr"/>
+          </a:p>
+        </p:txBody>
+      </p:sp>
+      <p:sp>
+        <p:nvSpPr>
+          <p:cNvPr id="16" name="Oval 15"/>
+          <p:cNvSpPr/>
+          <p:nvPr/>
+        </p:nvSpPr>
+        <p:spPr>
+          <a:xfrm>
+            <a:off x="621792" y="4946903"/>
+            <a:ext cx="310896" cy="310896"/>
+          </a:xfrm>
+          <a:prstGeom prst="ellipse">
+            <a:avLst/>
+          </a:prstGeom>
+          <a:solidFill>
+            <a:srgbClr val="009CD6"/>
+          </a:solidFill>
+          <a:ln>
+            <a:noFill/>
+          </a:ln>
+          <a:effectLst/>
+        </p:spPr>
+        <p:style>
+          <a:lnRef idx="1">
+            <a:schemeClr val="accent1"/>
+          </a:lnRef>
+          <a:fillRef idx="3">
+            <a:schemeClr val="accent1"/>
+          </a:fillRef>
+          <a:effectRef idx="2">
+            <a:schemeClr val="accent1"/>
+          </a:effectRef>
+          <a:fontRef idx="minor">
+            <a:schemeClr val="lt1"/>
+          </a:fontRef>
+        </p:style>
+        <p:txBody>
+          <a:bodyPr rtlCol="0" anchor="ctr" lIns="0" rIns="0" tIns="0" bIns="0" wrap="square"/>
+          <a:lstStyle/>
+          <a:p>
+            <a:pPr algn="ctr"/>
+            <a:r>
+              <a:rPr sz="1300" b="1" i="0">
+                <a:solidFill>
+                  <a:srgbClr val="FFFFFF"/>
+                </a:solidFill>
+                <a:latin typeface="Arial"/>
+              </a:rPr>
+              <a:t>5</a:t>
+            </a:r>
+          </a:p>
+        </p:txBody>
+      </p:sp>
+      <p:sp>
+        <p:nvSpPr>
+          <p:cNvPr id="17" name="TextBox 16"/>
+          <p:cNvSpPr txBox="1"/>
+          <p:nvPr/>
+        </p:nvSpPr>
+        <p:spPr>
+          <a:xfrm>
+            <a:off x="1115568" y="4901183"/>
+            <a:ext cx="10527487" cy="813815"/>
+          </a:xfrm>
+          <a:prstGeom prst="rect">
+            <a:avLst/>
+          </a:prstGeom>
+          <a:noFill/>
+        </p:spPr>
+        <p:txBody>
+          <a:bodyPr wrap="square">
+            <a:spAutoFit/>
+          </a:bodyPr>
+          <a:lstStyle/>
+          <a:p>
+            <a:pPr>
+              <a:spcAft>
+                <a:spcPts val="300"/>
+              </a:spcAft>
+            </a:pPr>
+            <a:r>
+              <a:rPr sz="1900" b="1" i="0">
+                <a:solidFill>
+                  <a:srgbClr val="1A1A1A"/>
+                </a:solidFill>
+                <a:latin typeface="Arial"/>
+              </a:rPr>
+              <a:t>Digital Government Authority (PDGA)</a:t>
+            </a:r>
+          </a:p>
+          <a:p>
+            <a:pPr>
+              <a:spcAft>
+                <a:spcPts val="300"/>
+              </a:spcAft>
+            </a:pPr>
+            <a:r>
+              <a:rPr sz="1550" b="0" i="0">
+                <a:solidFill>
+                  <a:srgbClr val="595959"/>
+                </a:solidFill>
+                <a:latin typeface="Arial"/>
+              </a:rPr>
+              <a:t>Runs the shared data-exchange backbone and payments.</a:t>
+            </a:r>
+          </a:p>
+        </p:txBody>
+      </p:sp>
+      <p:sp>
+        <p:nvSpPr>
+          <p:cNvPr id="18" name="TextBox 17"/>
+          <p:cNvSpPr txBox="1"/>
+          <p:nvPr/>
+        </p:nvSpPr>
+        <p:spPr>
+          <a:xfrm>
+            <a:off x="658368" y="5870448"/>
+            <a:ext cx="10881360" cy="548640"/>
+          </a:xfrm>
+          <a:prstGeom prst="rect">
+            <a:avLst/>
+          </a:prstGeom>
+          <a:noFill/>
+        </p:spPr>
+        <p:txBody>
+          <a:bodyPr wrap="square">
+            <a:spAutoFit/>
+          </a:bodyPr>
+          <a:lstStyle/>
+          <a:p>
+            <a:r>
+              <a:rPr sz="1550" b="1" i="0">
                 <a:solidFill>
                   <a:srgbClr val="006E96"/>
                 </a:solidFill>
                 <a:latin typeface="Arial"/>
               </a:rPr>
-              <a:t>Not a Progressa problem. Most education sectors share it.</a:t>
-            </a:r>
-          </a:p>
-        </p:txBody>
-      </p:sp>
-      <p:sp>
-        <p:nvSpPr>
-          <p:cNvPr id="7" name="TextBox 6"/>
+              <a:t>Two registries — and neither is the undisputed owner of the learner.</a:t>
+            </a:r>
+          </a:p>
+        </p:txBody>
+      </p:sp>
+      <p:sp>
+        <p:nvSpPr>
+          <p:cNvPr id="19" name="TextBox 18"/>
           <p:cNvSpPr txBox="1"/>
           <p:nvPr/>
         </p:nvSpPr>
@@ -13741,7 +13188,7 @@
                 </a:solidFill>
                 <a:latin typeface="Arial"/>
               </a:rPr>
-              <a:t>Fictional on purpose — so every step can be shown in full detail</a:t>
+              <a:t>One learner, three registrations, and the three lists do not agree</a:t>
             </a:r>
           </a:p>
         </p:txBody>
@@ -13755,7 +13202,7 @@
         <p:spPr>
           <a:xfrm>
             <a:off x="658368" y="1600200"/>
-            <a:ext cx="10881360" cy="1508760"/>
+            <a:ext cx="10881360" cy="2651760"/>
           </a:xfrm>
           <a:prstGeom prst="rect">
             <a:avLst/>
@@ -13780,7 +13227,7 @@
                 </a:solidFill>
                 <a:latin typeface="Arial"/>
               </a:rPr>
-              <a:t>Progressa shows every step in detail without exposing any real country, and its shapes — duplicate registries, paper re-entry, a stalled flagship — are the ones you will recognise.</a:t>
+              <a:t>A learner is registered three times — once in the school census, once by the Examination Authority for exams, once by a social grant programme. None of the three lists agree.</a:t>
             </a:r>
           </a:p>
           <a:p>
@@ -13796,7 +13243,7 @@
                 </a:solidFill>
                 <a:latin typeface="Arial"/>
               </a:rPr>
-              <a:t>Keep your own sector in mind as we go.</a:t>
+              <a:t>A parent proves the child's identity on paper at every counter, because no system trusts another's. The minister has promised a single learner record that follows the child from primary school to university — and it cannot be delivered, because the systems do not fit together.</a:t>
             </a:r>
           </a:p>
         </p:txBody>
@@ -13809,7 +13256,7 @@
         </p:nvSpPr>
         <p:spPr>
           <a:xfrm>
-            <a:off x="658368" y="3291840"/>
+            <a:off x="658368" y="4434840"/>
             <a:ext cx="10881360" cy="1325880"/>
           </a:xfrm>
           <a:prstGeom prst="roundRect">
@@ -13855,7 +13302,7 @@
         </p:nvSpPr>
         <p:spPr>
           <a:xfrm>
-            <a:off x="859536" y="3483864"/>
+            <a:off x="859536" y="4626864"/>
             <a:ext cx="10479024" cy="1051560"/>
           </a:xfrm>
           <a:prstGeom prst="rect">
@@ -13881,7 +13328,7 @@
                 </a:solidFill>
                 <a:latin typeface="Arial"/>
               </a:rPr>
-              <a:t>The institutions change. The method does not.</a:t>
+              <a:t>Not a Progressa problem. Most education sectors share it.</a:t>
             </a:r>
           </a:p>
         </p:txBody>
@@ -14011,27 +13458,84 @@
                 </a:solidFill>
                 <a:latin typeface="Arial"/>
               </a:rPr>
-              <a:t>Five phases, six deliverables — this is what you will watch being built</a:t>
-            </a:r>
-          </a:p>
-        </p:txBody>
-      </p:sp>
-      <p:sp>
-        <p:nvSpPr>
-          <p:cNvPr id="4" name="Oval 3"/>
+              <a:t>Fictional on purpose — so every step can be shown in full detail</a:t>
+            </a:r>
+          </a:p>
+        </p:txBody>
+      </p:sp>
+      <p:sp>
+        <p:nvSpPr>
+          <p:cNvPr id="4" name="TextBox 3"/>
+          <p:cNvSpPr txBox="1"/>
+          <p:nvPr/>
+        </p:nvSpPr>
+        <p:spPr>
+          <a:xfrm>
+            <a:off x="658368" y="1600200"/>
+            <a:ext cx="10881360" cy="1508760"/>
+          </a:xfrm>
+          <a:prstGeom prst="rect">
+            <a:avLst/>
+          </a:prstGeom>
+          <a:noFill/>
+        </p:spPr>
+        <p:txBody>
+          <a:bodyPr wrap="square">
+            <a:spAutoFit/>
+          </a:bodyPr>
+          <a:lstStyle/>
+          <a:p>
+            <a:pPr>
+              <a:spcAft>
+                <a:spcPts val="1200"/>
+              </a:spcAft>
+            </a:pPr>
+            <a:r>
+              <a:rPr sz="2000" b="0" i="0">
+                <a:solidFill>
+                  <a:srgbClr val="1A1A1A"/>
+                </a:solidFill>
+                <a:latin typeface="Arial"/>
+              </a:rPr>
+              <a:t>Progressa shows every step in detail without exposing any real country, and its shapes — duplicate registries, paper re-entry, a stalled flagship — are the ones you will recognise.</a:t>
+            </a:r>
+          </a:p>
+          <a:p>
+            <a:pPr>
+              <a:spcAft>
+                <a:spcPts val="1200"/>
+              </a:spcAft>
+            </a:pPr>
+            <a:r>
+              <a:rPr sz="2000" b="0" i="0">
+                <a:solidFill>
+                  <a:srgbClr val="1A1A1A"/>
+                </a:solidFill>
+                <a:latin typeface="Arial"/>
+              </a:rPr>
+              <a:t>Keep your own sector in mind as we go.</a:t>
+            </a:r>
+          </a:p>
+        </p:txBody>
+      </p:sp>
+      <p:sp>
+        <p:nvSpPr>
+          <p:cNvPr id="5" name="Rounded Rectangle 4"/>
           <p:cNvSpPr/>
           <p:nvPr/>
         </p:nvSpPr>
         <p:spPr>
           <a:xfrm>
-            <a:off x="621792" y="1463040"/>
-            <a:ext cx="310896" cy="310896"/>
-          </a:xfrm>
-          <a:prstGeom prst="ellipse">
-            <a:avLst/>
+            <a:off x="658368" y="3291840"/>
+            <a:ext cx="10881360" cy="1325880"/>
+          </a:xfrm>
+          <a:prstGeom prst="roundRect">
+            <a:avLst>
+              <a:gd name="adj" fmla="val 4500"/>
+            </a:avLst>
           </a:prstGeom>
           <a:solidFill>
-            <a:srgbClr val="009CD6"/>
+            <a:srgbClr val="E5F5FB"/>
           </a:solidFill>
           <a:ln>
             <a:noFill/>
@@ -14053,32 +13557,23 @@
           </a:fontRef>
         </p:style>
         <p:txBody>
-          <a:bodyPr rtlCol="0" anchor="ctr" lIns="0" rIns="0" tIns="0" bIns="0" wrap="square"/>
+          <a:bodyPr rtlCol="0" anchor="ctr"/>
           <a:lstStyle/>
           <a:p>
             <a:pPr algn="ctr"/>
-            <a:r>
-              <a:rPr sz="1300" b="1" i="0">
-                <a:solidFill>
-                  <a:srgbClr val="FFFFFF"/>
-                </a:solidFill>
-                <a:latin typeface="Arial"/>
-              </a:rPr>
-              <a:t>1</a:t>
-            </a:r>
-          </a:p>
-        </p:txBody>
-      </p:sp>
-      <p:sp>
-        <p:nvSpPr>
-          <p:cNvPr id="5" name="TextBox 4"/>
+          </a:p>
+        </p:txBody>
+      </p:sp>
+      <p:sp>
+        <p:nvSpPr>
+          <p:cNvPr id="6" name="TextBox 5"/>
           <p:cNvSpPr txBox="1"/>
           <p:nvPr/>
         </p:nvSpPr>
         <p:spPr>
           <a:xfrm>
-            <a:off x="1115568" y="1417320"/>
-            <a:ext cx="10527487" cy="685799"/>
+            <a:off x="859536" y="3483864"/>
+            <a:ext cx="10479024" cy="1051560"/>
           </a:xfrm>
           <a:prstGeom prst="rect">
             <a:avLst/>
@@ -14093,834 +13588,24 @@
           <a:p>
             <a:pPr>
               <a:spcAft>
-                <a:spcPts val="300"/>
+                <a:spcPts val="700"/>
               </a:spcAft>
             </a:pPr>
             <a:r>
-              <a:rPr sz="1700" b="1" i="0">
-                <a:solidFill>
-                  <a:srgbClr val="1A1A1A"/>
-                </a:solidFill>
-                <a:latin typeface="Arial"/>
-              </a:rPr>
-              <a:t>A picture of what exists today</a:t>
-            </a:r>
-          </a:p>
-          <a:p>
-            <a:pPr>
-              <a:spcAft>
-                <a:spcPts val="300"/>
-              </a:spcAft>
-            </a:pPr>
-            <a:r>
-              <a:rPr sz="1550" b="0" i="0">
-                <a:solidFill>
-                  <a:srgbClr val="595959"/>
-                </a:solidFill>
-                <a:latin typeface="Arial"/>
-              </a:rPr>
-              <a:t>Discover</a:t>
-            </a:r>
-          </a:p>
-        </p:txBody>
-      </p:sp>
-      <p:sp>
-        <p:nvSpPr>
-          <p:cNvPr id="6" name="Rectangle 5"/>
-          <p:cNvSpPr/>
-          <p:nvPr/>
-        </p:nvSpPr>
-        <p:spPr>
-          <a:xfrm>
-            <a:off x="621792" y="2107692"/>
-            <a:ext cx="10881360" cy="12700"/>
-          </a:xfrm>
-          <a:prstGeom prst="rect">
-            <a:avLst/>
-          </a:prstGeom>
-          <a:solidFill>
-            <a:srgbClr val="DDECF4"/>
-          </a:solidFill>
-          <a:ln>
-            <a:noFill/>
-          </a:ln>
-          <a:effectLst/>
-        </p:spPr>
-        <p:style>
-          <a:lnRef idx="1">
-            <a:schemeClr val="accent1"/>
-          </a:lnRef>
-          <a:fillRef idx="3">
-            <a:schemeClr val="accent1"/>
-          </a:fillRef>
-          <a:effectRef idx="2">
-            <a:schemeClr val="accent1"/>
-          </a:effectRef>
-          <a:fontRef idx="minor">
-            <a:schemeClr val="lt1"/>
-          </a:fontRef>
-        </p:style>
-        <p:txBody>
-          <a:bodyPr rtlCol="0" anchor="ctr"/>
-          <a:lstStyle/>
-          <a:p>
-            <a:pPr algn="ctr"/>
-          </a:p>
-        </p:txBody>
-      </p:sp>
-      <p:sp>
-        <p:nvSpPr>
-          <p:cNvPr id="7" name="Oval 6"/>
-          <p:cNvSpPr/>
-          <p:nvPr/>
-        </p:nvSpPr>
-        <p:spPr>
-          <a:xfrm>
-            <a:off x="621792" y="2194560"/>
-            <a:ext cx="310896" cy="310896"/>
-          </a:xfrm>
-          <a:prstGeom prst="ellipse">
-            <a:avLst/>
-          </a:prstGeom>
-          <a:solidFill>
-            <a:srgbClr val="009CD6"/>
-          </a:solidFill>
-          <a:ln>
-            <a:noFill/>
-          </a:ln>
-          <a:effectLst/>
-        </p:spPr>
-        <p:style>
-          <a:lnRef idx="1">
-            <a:schemeClr val="accent1"/>
-          </a:lnRef>
-          <a:fillRef idx="3">
-            <a:schemeClr val="accent1"/>
-          </a:fillRef>
-          <a:effectRef idx="2">
-            <a:schemeClr val="accent1"/>
-          </a:effectRef>
-          <a:fontRef idx="minor">
-            <a:schemeClr val="lt1"/>
-          </a:fontRef>
-        </p:style>
-        <p:txBody>
-          <a:bodyPr rtlCol="0" anchor="ctr" lIns="0" rIns="0" tIns="0" bIns="0" wrap="square"/>
-          <a:lstStyle/>
-          <a:p>
-            <a:pPr algn="ctr"/>
-            <a:r>
-              <a:rPr sz="1300" b="1" i="0">
-                <a:solidFill>
-                  <a:srgbClr val="FFFFFF"/>
-                </a:solidFill>
-                <a:latin typeface="Arial"/>
-              </a:rPr>
-              <a:t>2</a:t>
-            </a:r>
-          </a:p>
-        </p:txBody>
-      </p:sp>
-      <p:sp>
-        <p:nvSpPr>
-          <p:cNvPr id="8" name="TextBox 7"/>
-          <p:cNvSpPr txBox="1"/>
-          <p:nvPr/>
-        </p:nvSpPr>
-        <p:spPr>
-          <a:xfrm>
-            <a:off x="1115568" y="2148840"/>
-            <a:ext cx="10527487" cy="685799"/>
-          </a:xfrm>
-          <a:prstGeom prst="rect">
-            <a:avLst/>
-          </a:prstGeom>
-          <a:noFill/>
-        </p:spPr>
-        <p:txBody>
-          <a:bodyPr wrap="square">
-            <a:spAutoFit/>
-          </a:bodyPr>
-          <a:lstStyle/>
-          <a:p>
-            <a:pPr>
-              <a:spcAft>
-                <a:spcPts val="300"/>
-              </a:spcAft>
-            </a:pPr>
-            <a:r>
-              <a:rPr sz="1700" b="1" i="0">
-                <a:solidFill>
-                  <a:srgbClr val="1A1A1A"/>
-                </a:solidFill>
-                <a:latin typeface="Arial"/>
-              </a:rPr>
-              <a:t>A ranked gap analysis</a:t>
-            </a:r>
-          </a:p>
-          <a:p>
-            <a:pPr>
-              <a:spcAft>
-                <a:spcPts val="300"/>
-              </a:spcAft>
-            </a:pPr>
-            <a:r>
-              <a:rPr sz="1550" b="0" i="0">
-                <a:solidFill>
-                  <a:srgbClr val="595959"/>
-                </a:solidFill>
-                <a:latin typeface="Arial"/>
-              </a:rPr>
-              <a:t>Assess</a:t>
-            </a:r>
-          </a:p>
-        </p:txBody>
-      </p:sp>
-      <p:sp>
-        <p:nvSpPr>
-          <p:cNvPr id="9" name="Rectangle 8"/>
-          <p:cNvSpPr/>
-          <p:nvPr/>
-        </p:nvSpPr>
-        <p:spPr>
-          <a:xfrm>
-            <a:off x="621792" y="2839212"/>
-            <a:ext cx="10881360" cy="12700"/>
-          </a:xfrm>
-          <a:prstGeom prst="rect">
-            <a:avLst/>
-          </a:prstGeom>
-          <a:solidFill>
-            <a:srgbClr val="DDECF4"/>
-          </a:solidFill>
-          <a:ln>
-            <a:noFill/>
-          </a:ln>
-          <a:effectLst/>
-        </p:spPr>
-        <p:style>
-          <a:lnRef idx="1">
-            <a:schemeClr val="accent1"/>
-          </a:lnRef>
-          <a:fillRef idx="3">
-            <a:schemeClr val="accent1"/>
-          </a:fillRef>
-          <a:effectRef idx="2">
-            <a:schemeClr val="accent1"/>
-          </a:effectRef>
-          <a:fontRef idx="minor">
-            <a:schemeClr val="lt1"/>
-          </a:fontRef>
-        </p:style>
-        <p:txBody>
-          <a:bodyPr rtlCol="0" anchor="ctr"/>
-          <a:lstStyle/>
-          <a:p>
-            <a:pPr algn="ctr"/>
-          </a:p>
-        </p:txBody>
-      </p:sp>
-      <p:sp>
-        <p:nvSpPr>
-          <p:cNvPr id="10" name="Oval 9"/>
-          <p:cNvSpPr/>
-          <p:nvPr/>
-        </p:nvSpPr>
-        <p:spPr>
-          <a:xfrm>
-            <a:off x="621792" y="2926079"/>
-            <a:ext cx="310896" cy="310896"/>
-          </a:xfrm>
-          <a:prstGeom prst="ellipse">
-            <a:avLst/>
-          </a:prstGeom>
-          <a:solidFill>
-            <a:srgbClr val="009CD6"/>
-          </a:solidFill>
-          <a:ln>
-            <a:noFill/>
-          </a:ln>
-          <a:effectLst/>
-        </p:spPr>
-        <p:style>
-          <a:lnRef idx="1">
-            <a:schemeClr val="accent1"/>
-          </a:lnRef>
-          <a:fillRef idx="3">
-            <a:schemeClr val="accent1"/>
-          </a:fillRef>
-          <a:effectRef idx="2">
-            <a:schemeClr val="accent1"/>
-          </a:effectRef>
-          <a:fontRef idx="minor">
-            <a:schemeClr val="lt1"/>
-          </a:fontRef>
-        </p:style>
-        <p:txBody>
-          <a:bodyPr rtlCol="0" anchor="ctr" lIns="0" rIns="0" tIns="0" bIns="0" wrap="square"/>
-          <a:lstStyle/>
-          <a:p>
-            <a:pPr algn="ctr"/>
-            <a:r>
-              <a:rPr sz="1300" b="1" i="0">
-                <a:solidFill>
-                  <a:srgbClr val="FFFFFF"/>
-                </a:solidFill>
-                <a:latin typeface="Arial"/>
-              </a:rPr>
-              <a:t>3</a:t>
-            </a:r>
-          </a:p>
-        </p:txBody>
-      </p:sp>
-      <p:sp>
-        <p:nvSpPr>
-          <p:cNvPr id="11" name="TextBox 10"/>
-          <p:cNvSpPr txBox="1"/>
-          <p:nvPr/>
-        </p:nvSpPr>
-        <p:spPr>
-          <a:xfrm>
-            <a:off x="1115568" y="2880360"/>
-            <a:ext cx="10527487" cy="685799"/>
-          </a:xfrm>
-          <a:prstGeom prst="rect">
-            <a:avLst/>
-          </a:prstGeom>
-          <a:noFill/>
-        </p:spPr>
-        <p:txBody>
-          <a:bodyPr wrap="square">
-            <a:spAutoFit/>
-          </a:bodyPr>
-          <a:lstStyle/>
-          <a:p>
-            <a:pPr>
-              <a:spcAft>
-                <a:spcPts val="300"/>
-              </a:spcAft>
-            </a:pPr>
-            <a:r>
-              <a:rPr sz="1700" b="1" i="0">
-                <a:solidFill>
-                  <a:srgbClr val="1A1A1A"/>
-                </a:solidFill>
-                <a:latin typeface="Arial"/>
-              </a:rPr>
-              <a:t>A localised framework with build, buy or share calls</a:t>
-            </a:r>
-          </a:p>
-          <a:p>
-            <a:pPr>
-              <a:spcAft>
-                <a:spcPts val="300"/>
-              </a:spcAft>
-            </a:pPr>
-            <a:r>
-              <a:rPr sz="1550" b="0" i="0">
-                <a:solidFill>
-                  <a:srgbClr val="595959"/>
-                </a:solidFill>
-                <a:latin typeface="Arial"/>
-              </a:rPr>
-              <a:t>Adapt</a:t>
-            </a:r>
-          </a:p>
-        </p:txBody>
-      </p:sp>
-      <p:sp>
-        <p:nvSpPr>
-          <p:cNvPr id="12" name="Rectangle 11"/>
-          <p:cNvSpPr/>
-          <p:nvPr/>
-        </p:nvSpPr>
-        <p:spPr>
-          <a:xfrm>
-            <a:off x="621792" y="3570732"/>
-            <a:ext cx="10881360" cy="12700"/>
-          </a:xfrm>
-          <a:prstGeom prst="rect">
-            <a:avLst/>
-          </a:prstGeom>
-          <a:solidFill>
-            <a:srgbClr val="DDECF4"/>
-          </a:solidFill>
-          <a:ln>
-            <a:noFill/>
-          </a:ln>
-          <a:effectLst/>
-        </p:spPr>
-        <p:style>
-          <a:lnRef idx="1">
-            <a:schemeClr val="accent1"/>
-          </a:lnRef>
-          <a:fillRef idx="3">
-            <a:schemeClr val="accent1"/>
-          </a:fillRef>
-          <a:effectRef idx="2">
-            <a:schemeClr val="accent1"/>
-          </a:effectRef>
-          <a:fontRef idx="minor">
-            <a:schemeClr val="lt1"/>
-          </a:fontRef>
-        </p:style>
-        <p:txBody>
-          <a:bodyPr rtlCol="0" anchor="ctr"/>
-          <a:lstStyle/>
-          <a:p>
-            <a:pPr algn="ctr"/>
-          </a:p>
-        </p:txBody>
-      </p:sp>
-      <p:sp>
-        <p:nvSpPr>
-          <p:cNvPr id="13" name="Oval 12"/>
-          <p:cNvSpPr/>
-          <p:nvPr/>
-        </p:nvSpPr>
-        <p:spPr>
-          <a:xfrm>
-            <a:off x="621792" y="3657600"/>
-            <a:ext cx="310896" cy="310896"/>
-          </a:xfrm>
-          <a:prstGeom prst="ellipse">
-            <a:avLst/>
-          </a:prstGeom>
-          <a:solidFill>
-            <a:srgbClr val="009CD6"/>
-          </a:solidFill>
-          <a:ln>
-            <a:noFill/>
-          </a:ln>
-          <a:effectLst/>
-        </p:spPr>
-        <p:style>
-          <a:lnRef idx="1">
-            <a:schemeClr val="accent1"/>
-          </a:lnRef>
-          <a:fillRef idx="3">
-            <a:schemeClr val="accent1"/>
-          </a:fillRef>
-          <a:effectRef idx="2">
-            <a:schemeClr val="accent1"/>
-          </a:effectRef>
-          <a:fontRef idx="minor">
-            <a:schemeClr val="lt1"/>
-          </a:fontRef>
-        </p:style>
-        <p:txBody>
-          <a:bodyPr rtlCol="0" anchor="ctr" lIns="0" rIns="0" tIns="0" bIns="0" wrap="square"/>
-          <a:lstStyle/>
-          <a:p>
-            <a:pPr algn="ctr"/>
-            <a:r>
-              <a:rPr sz="1300" b="1" i="0">
-                <a:solidFill>
-                  <a:srgbClr val="FFFFFF"/>
-                </a:solidFill>
-                <a:latin typeface="Arial"/>
-              </a:rPr>
-              <a:t>4</a:t>
-            </a:r>
-          </a:p>
-        </p:txBody>
-      </p:sp>
-      <p:sp>
-        <p:nvSpPr>
-          <p:cNvPr id="14" name="TextBox 13"/>
-          <p:cNvSpPr txBox="1"/>
-          <p:nvPr/>
-        </p:nvSpPr>
-        <p:spPr>
-          <a:xfrm>
-            <a:off x="1115568" y="3611880"/>
-            <a:ext cx="10527487" cy="685799"/>
-          </a:xfrm>
-          <a:prstGeom prst="rect">
-            <a:avLst/>
-          </a:prstGeom>
-          <a:noFill/>
-        </p:spPr>
-        <p:txBody>
-          <a:bodyPr wrap="square">
-            <a:spAutoFit/>
-          </a:bodyPr>
-          <a:lstStyle/>
-          <a:p>
-            <a:pPr>
-              <a:spcAft>
-                <a:spcPts val="300"/>
-              </a:spcAft>
-            </a:pPr>
-            <a:r>
-              <a:rPr sz="1700" b="1" i="0">
-                <a:solidFill>
-                  <a:srgbClr val="1A1A1A"/>
-                </a:solidFill>
-                <a:latin typeface="Arial"/>
-              </a:rPr>
-              <a:t>A target architecture — the designed future state</a:t>
-            </a:r>
-          </a:p>
-          <a:p>
-            <a:pPr>
-              <a:spcAft>
-                <a:spcPts val="300"/>
-              </a:spcAft>
-            </a:pPr>
-            <a:r>
-              <a:rPr sz="1550" b="0" i="0">
-                <a:solidFill>
-                  <a:srgbClr val="595959"/>
-                </a:solidFill>
-                <a:latin typeface="Arial"/>
-              </a:rPr>
-              <a:t>Plan</a:t>
-            </a:r>
-          </a:p>
-        </p:txBody>
-      </p:sp>
-      <p:sp>
-        <p:nvSpPr>
-          <p:cNvPr id="15" name="Rectangle 14"/>
-          <p:cNvSpPr/>
-          <p:nvPr/>
-        </p:nvSpPr>
-        <p:spPr>
-          <a:xfrm>
-            <a:off x="621792" y="4302252"/>
-            <a:ext cx="10881360" cy="12700"/>
-          </a:xfrm>
-          <a:prstGeom prst="rect">
-            <a:avLst/>
-          </a:prstGeom>
-          <a:solidFill>
-            <a:srgbClr val="DDECF4"/>
-          </a:solidFill>
-          <a:ln>
-            <a:noFill/>
-          </a:ln>
-          <a:effectLst/>
-        </p:spPr>
-        <p:style>
-          <a:lnRef idx="1">
-            <a:schemeClr val="accent1"/>
-          </a:lnRef>
-          <a:fillRef idx="3">
-            <a:schemeClr val="accent1"/>
-          </a:fillRef>
-          <a:effectRef idx="2">
-            <a:schemeClr val="accent1"/>
-          </a:effectRef>
-          <a:fontRef idx="minor">
-            <a:schemeClr val="lt1"/>
-          </a:fontRef>
-        </p:style>
-        <p:txBody>
-          <a:bodyPr rtlCol="0" anchor="ctr"/>
-          <a:lstStyle/>
-          <a:p>
-            <a:pPr algn="ctr"/>
-          </a:p>
-        </p:txBody>
-      </p:sp>
-      <p:sp>
-        <p:nvSpPr>
-          <p:cNvPr id="16" name="Oval 15"/>
-          <p:cNvSpPr/>
-          <p:nvPr/>
-        </p:nvSpPr>
-        <p:spPr>
-          <a:xfrm>
-            <a:off x="621792" y="4389120"/>
-            <a:ext cx="310896" cy="310896"/>
-          </a:xfrm>
-          <a:prstGeom prst="ellipse">
-            <a:avLst/>
-          </a:prstGeom>
-          <a:solidFill>
-            <a:srgbClr val="009CD6"/>
-          </a:solidFill>
-          <a:ln>
-            <a:noFill/>
-          </a:ln>
-          <a:effectLst/>
-        </p:spPr>
-        <p:style>
-          <a:lnRef idx="1">
-            <a:schemeClr val="accent1"/>
-          </a:lnRef>
-          <a:fillRef idx="3">
-            <a:schemeClr val="accent1"/>
-          </a:fillRef>
-          <a:effectRef idx="2">
-            <a:schemeClr val="accent1"/>
-          </a:effectRef>
-          <a:fontRef idx="minor">
-            <a:schemeClr val="lt1"/>
-          </a:fontRef>
-        </p:style>
-        <p:txBody>
-          <a:bodyPr rtlCol="0" anchor="ctr" lIns="0" rIns="0" tIns="0" bIns="0" wrap="square"/>
-          <a:lstStyle/>
-          <a:p>
-            <a:pPr algn="ctr"/>
-            <a:r>
-              <a:rPr sz="1300" b="1" i="0">
-                <a:solidFill>
-                  <a:srgbClr val="FFFFFF"/>
-                </a:solidFill>
-                <a:latin typeface="Arial"/>
-              </a:rPr>
-              <a:t>5</a:t>
-            </a:r>
-          </a:p>
-        </p:txBody>
-      </p:sp>
-      <p:sp>
-        <p:nvSpPr>
-          <p:cNvPr id="17" name="TextBox 16"/>
-          <p:cNvSpPr txBox="1"/>
-          <p:nvPr/>
-        </p:nvSpPr>
-        <p:spPr>
-          <a:xfrm>
-            <a:off x="1115568" y="4343400"/>
-            <a:ext cx="10527487" cy="685799"/>
-          </a:xfrm>
-          <a:prstGeom prst="rect">
-            <a:avLst/>
-          </a:prstGeom>
-          <a:noFill/>
-        </p:spPr>
-        <p:txBody>
-          <a:bodyPr wrap="square">
-            <a:spAutoFit/>
-          </a:bodyPr>
-          <a:lstStyle/>
-          <a:p>
-            <a:pPr>
-              <a:spcAft>
-                <a:spcPts val="300"/>
-              </a:spcAft>
-            </a:pPr>
-            <a:r>
-              <a:rPr sz="1700" b="1" i="0">
-                <a:solidFill>
-                  <a:srgbClr val="1A1A1A"/>
-                </a:solidFill>
-                <a:latin typeface="Arial"/>
-              </a:rPr>
-              <a:t>A sequenced, costed roadmap</a:t>
-            </a:r>
-          </a:p>
-          <a:p>
-            <a:pPr>
-              <a:spcAft>
-                <a:spcPts val="300"/>
-              </a:spcAft>
-            </a:pPr>
-            <a:r>
-              <a:rPr sz="1550" b="0" i="0">
-                <a:solidFill>
-                  <a:srgbClr val="595959"/>
-                </a:solidFill>
-                <a:latin typeface="Arial"/>
-              </a:rPr>
-              <a:t>Plan</a:t>
-            </a:r>
-          </a:p>
-        </p:txBody>
-      </p:sp>
-      <p:sp>
-        <p:nvSpPr>
-          <p:cNvPr id="18" name="Rectangle 17"/>
-          <p:cNvSpPr/>
-          <p:nvPr/>
-        </p:nvSpPr>
-        <p:spPr>
-          <a:xfrm>
-            <a:off x="621792" y="5033772"/>
-            <a:ext cx="10881360" cy="12700"/>
-          </a:xfrm>
-          <a:prstGeom prst="rect">
-            <a:avLst/>
-          </a:prstGeom>
-          <a:solidFill>
-            <a:srgbClr val="DDECF4"/>
-          </a:solidFill>
-          <a:ln>
-            <a:noFill/>
-          </a:ln>
-          <a:effectLst/>
-        </p:spPr>
-        <p:style>
-          <a:lnRef idx="1">
-            <a:schemeClr val="accent1"/>
-          </a:lnRef>
-          <a:fillRef idx="3">
-            <a:schemeClr val="accent1"/>
-          </a:fillRef>
-          <a:effectRef idx="2">
-            <a:schemeClr val="accent1"/>
-          </a:effectRef>
-          <a:fontRef idx="minor">
-            <a:schemeClr val="lt1"/>
-          </a:fontRef>
-        </p:style>
-        <p:txBody>
-          <a:bodyPr rtlCol="0" anchor="ctr"/>
-          <a:lstStyle/>
-          <a:p>
-            <a:pPr algn="ctr"/>
-          </a:p>
-        </p:txBody>
-      </p:sp>
-      <p:sp>
-        <p:nvSpPr>
-          <p:cNvPr id="19" name="Oval 18"/>
-          <p:cNvSpPr/>
-          <p:nvPr/>
-        </p:nvSpPr>
-        <p:spPr>
-          <a:xfrm>
-            <a:off x="621792" y="5120640"/>
-            <a:ext cx="310896" cy="310896"/>
-          </a:xfrm>
-          <a:prstGeom prst="ellipse">
-            <a:avLst/>
-          </a:prstGeom>
-          <a:solidFill>
-            <a:srgbClr val="009CD6"/>
-          </a:solidFill>
-          <a:ln>
-            <a:noFill/>
-          </a:ln>
-          <a:effectLst/>
-        </p:spPr>
-        <p:style>
-          <a:lnRef idx="1">
-            <a:schemeClr val="accent1"/>
-          </a:lnRef>
-          <a:fillRef idx="3">
-            <a:schemeClr val="accent1"/>
-          </a:fillRef>
-          <a:effectRef idx="2">
-            <a:schemeClr val="accent1"/>
-          </a:effectRef>
-          <a:fontRef idx="minor">
-            <a:schemeClr val="lt1"/>
-          </a:fontRef>
-        </p:style>
-        <p:txBody>
-          <a:bodyPr rtlCol="0" anchor="ctr" lIns="0" rIns="0" tIns="0" bIns="0" wrap="square"/>
-          <a:lstStyle/>
-          <a:p>
-            <a:pPr algn="ctr"/>
-            <a:r>
-              <a:rPr sz="1300" b="1" i="0">
-                <a:solidFill>
-                  <a:srgbClr val="FFFFFF"/>
-                </a:solidFill>
-                <a:latin typeface="Arial"/>
-              </a:rPr>
-              <a:t>6</a:t>
-            </a:r>
-          </a:p>
-        </p:txBody>
-      </p:sp>
-      <p:sp>
-        <p:nvSpPr>
-          <p:cNvPr id="20" name="TextBox 19"/>
-          <p:cNvSpPr txBox="1"/>
-          <p:nvPr/>
-        </p:nvSpPr>
-        <p:spPr>
-          <a:xfrm>
-            <a:off x="1115568" y="5074920"/>
-            <a:ext cx="10527487" cy="685799"/>
-          </a:xfrm>
-          <a:prstGeom prst="rect">
-            <a:avLst/>
-          </a:prstGeom>
-          <a:noFill/>
-        </p:spPr>
-        <p:txBody>
-          <a:bodyPr wrap="square">
-            <a:spAutoFit/>
-          </a:bodyPr>
-          <a:lstStyle/>
-          <a:p>
-            <a:pPr>
-              <a:spcAft>
-                <a:spcPts val="300"/>
-              </a:spcAft>
-            </a:pPr>
-            <a:r>
-              <a:rPr sz="1700" b="1" i="0">
-                <a:solidFill>
-                  <a:srgbClr val="1A1A1A"/>
-                </a:solidFill>
-                <a:latin typeface="Arial"/>
-              </a:rPr>
-              <a:t>A living, governed architecture</a:t>
-            </a:r>
-          </a:p>
-          <a:p>
-            <a:pPr>
-              <a:spcAft>
-                <a:spcPts val="300"/>
-              </a:spcAft>
-            </a:pPr>
-            <a:r>
-              <a:rPr sz="1550" b="0" i="0">
-                <a:solidFill>
-                  <a:srgbClr val="595959"/>
-                </a:solidFill>
-                <a:latin typeface="Arial"/>
-              </a:rPr>
-              <a:t>Execute &amp; Govern</a:t>
-            </a:r>
-          </a:p>
-        </p:txBody>
-      </p:sp>
-      <p:sp>
-        <p:nvSpPr>
-          <p:cNvPr id="21" name="TextBox 20"/>
-          <p:cNvSpPr txBox="1"/>
-          <p:nvPr/>
-        </p:nvSpPr>
-        <p:spPr>
-          <a:xfrm>
-            <a:off x="658368" y="5916168"/>
-            <a:ext cx="10881360" cy="548640"/>
-          </a:xfrm>
-          <a:prstGeom prst="rect">
-            <a:avLst/>
-          </a:prstGeom>
-          <a:noFill/>
-        </p:spPr>
-        <p:txBody>
-          <a:bodyPr wrap="square">
-            <a:spAutoFit/>
-          </a:bodyPr>
-          <a:lstStyle/>
-          <a:p>
-            <a:r>
-              <a:rPr sz="1550" b="1" i="0">
+              <a:rPr sz="2300" b="1" i="0">
                 <a:solidFill>
                   <a:srgbClr val="006E96"/>
                 </a:solidFill>
                 <a:latin typeface="Arial"/>
               </a:rPr>
-              <a:t>Six deliverables across five phases, produced in that order — Plan produces two.</a:t>
-            </a:r>
-          </a:p>
-        </p:txBody>
-      </p:sp>
-      <p:sp>
-        <p:nvSpPr>
-          <p:cNvPr id="22" name="TextBox 21"/>
+              <a:t>The institutions change. The method does not.</a:t>
+            </a:r>
+          </a:p>
+        </p:txBody>
+      </p:sp>
+      <p:sp>
+        <p:nvSpPr>
+          <p:cNvPr id="7" name="TextBox 6"/>
           <p:cNvSpPr txBox="1"/>
           <p:nvPr/>
         </p:nvSpPr>
@@ -14972,95 +13657,23 @@
       <p:grpSpPr/>
       <p:sp>
         <p:nvSpPr>
-          <p:cNvPr id="2" name="TextBox 1"/>
-          <p:cNvSpPr txBox="1"/>
+          <p:cNvPr id="2" name="Rectangle 1"/>
+          <p:cNvSpPr/>
           <p:nvPr/>
         </p:nvSpPr>
         <p:spPr>
           <a:xfrm>
-            <a:off x="1005840" y="2103120"/>
-            <a:ext cx="10149840" cy="2377440"/>
+            <a:off x="457200" y="384048"/>
+            <a:ext cx="45720" cy="256032"/>
           </a:xfrm>
           <a:prstGeom prst="rect">
             <a:avLst/>
           </a:prstGeom>
-          <a:noFill/>
-        </p:spPr>
-        <p:txBody>
-          <a:bodyPr wrap="square">
-            <a:spAutoFit/>
-          </a:bodyPr>
-          <a:lstStyle/>
-          <a:p>
-            <a:r>
-              <a:rPr sz="3000" b="1" i="0">
-                <a:solidFill>
-                  <a:srgbClr val="1A1A1A"/>
-                </a:solidFill>
-                <a:latin typeface="Arial"/>
-              </a:rPr>
-              <a:t>Progressa is a realistic education sector with the fragmentation problem most countries share — the canvas for running the whole method, step by step, so you can reproduce it on your own.</a:t>
-            </a:r>
-          </a:p>
-        </p:txBody>
-      </p:sp>
-      <p:sp>
-        <p:nvSpPr>
-          <p:cNvPr id="3" name="TextBox 2"/>
-          <p:cNvSpPr txBox="1"/>
-          <p:nvPr/>
-        </p:nvSpPr>
-        <p:spPr>
-          <a:xfrm>
-            <a:off x="1005840" y="1554480"/>
-            <a:ext cx="5486400" cy="365760"/>
-          </a:xfrm>
-          <a:prstGeom prst="rect">
-            <a:avLst/>
-          </a:prstGeom>
-          <a:noFill/>
-        </p:spPr>
-        <p:txBody>
-          <a:bodyPr wrap="square">
-            <a:spAutoFit/>
-          </a:bodyPr>
-          <a:lstStyle/>
-          <a:p>
-            <a:r>
-              <a:rPr sz="1200" b="1" i="0">
-                <a:solidFill>
-                  <a:srgbClr val="006E96"/>
-                </a:solidFill>
-                <a:latin typeface="Arial"/>
-              </a:rPr>
-              <a:t>IN ONE SENTENCE</a:t>
-            </a:r>
-          </a:p>
-        </p:txBody>
-      </p:sp>
-      <p:sp>
-        <p:nvSpPr>
-          <p:cNvPr id="4" name="Rounded Rectangle 3"/>
-          <p:cNvSpPr/>
-          <p:nvPr/>
-        </p:nvSpPr>
-        <p:spPr>
-          <a:xfrm>
-            <a:off x="658368" y="4709160"/>
-            <a:ext cx="10881360" cy="1554480"/>
-          </a:xfrm>
-          <a:prstGeom prst="roundRect">
-            <a:avLst>
-              <a:gd name="adj" fmla="val 4500"/>
-            </a:avLst>
-          </a:prstGeom>
           <a:solidFill>
-            <a:srgbClr val="FFFFFF"/>
+            <a:srgbClr val="009CD6"/>
           </a:solidFill>
-          <a:ln w="9525">
-            <a:solidFill>
-              <a:srgbClr val="009CD6"/>
-            </a:solidFill>
+          <a:ln>
+            <a:noFill/>
           </a:ln>
           <a:effectLst/>
         </p:spPr>
@@ -15079,56 +13692,952 @@
           </a:fontRef>
         </p:style>
         <p:txBody>
-          <a:bodyPr rtlCol="0" anchor="ctr" wrap="square" lIns="228600" rIns="228600" tIns="109728" bIns="109728">
-            <a:noAutofit/>
+          <a:bodyPr rtlCol="0" anchor="ctr"/>
+          <a:lstStyle/>
+          <a:p>
+            <a:pPr algn="ctr"/>
+          </a:p>
+        </p:txBody>
+      </p:sp>
+      <p:sp>
+        <p:nvSpPr>
+          <p:cNvPr id="3" name="TextBox 2"/>
+          <p:cNvSpPr txBox="1"/>
+          <p:nvPr/>
+        </p:nvSpPr>
+        <p:spPr>
+          <a:xfrm>
+            <a:off x="621792" y="274320"/>
+            <a:ext cx="11247120" cy="914400"/>
+          </a:xfrm>
+          <a:prstGeom prst="rect">
+            <a:avLst/>
+          </a:prstGeom>
+          <a:noFill/>
+        </p:spPr>
+        <p:txBody>
+          <a:bodyPr wrap="square">
+            <a:spAutoFit/>
           </a:bodyPr>
           <a:lstStyle/>
           <a:p>
-            <a:pPr algn="l">
+            <a:r>
+              <a:rPr sz="2800" b="1" i="0">
+                <a:solidFill>
+                  <a:srgbClr val="1A1A1A"/>
+                </a:solidFill>
+                <a:latin typeface="Arial"/>
+              </a:rPr>
+              <a:t>Five phases, six deliverables — this is what you will watch being built</a:t>
+            </a:r>
+          </a:p>
+        </p:txBody>
+      </p:sp>
+      <p:sp>
+        <p:nvSpPr>
+          <p:cNvPr id="4" name="Oval 3"/>
+          <p:cNvSpPr/>
+          <p:nvPr/>
+        </p:nvSpPr>
+        <p:spPr>
+          <a:xfrm>
+            <a:off x="621792" y="1463040"/>
+            <a:ext cx="310896" cy="310896"/>
+          </a:xfrm>
+          <a:prstGeom prst="ellipse">
+            <a:avLst/>
+          </a:prstGeom>
+          <a:solidFill>
+            <a:srgbClr val="009CD6"/>
+          </a:solidFill>
+          <a:ln>
+            <a:noFill/>
+          </a:ln>
+          <a:effectLst/>
+        </p:spPr>
+        <p:style>
+          <a:lnRef idx="1">
+            <a:schemeClr val="accent1"/>
+          </a:lnRef>
+          <a:fillRef idx="3">
+            <a:schemeClr val="accent1"/>
+          </a:fillRef>
+          <a:effectRef idx="2">
+            <a:schemeClr val="accent1"/>
+          </a:effectRef>
+          <a:fontRef idx="minor">
+            <a:schemeClr val="lt1"/>
+          </a:fontRef>
+        </p:style>
+        <p:txBody>
+          <a:bodyPr rtlCol="0" anchor="ctr" lIns="0" rIns="0" tIns="0" bIns="0" wrap="square"/>
+          <a:lstStyle/>
+          <a:p>
+            <a:pPr algn="ctr"/>
+            <a:r>
+              <a:rPr sz="1300" b="1" i="0">
+                <a:solidFill>
+                  <a:srgbClr val="FFFFFF"/>
+                </a:solidFill>
+                <a:latin typeface="Arial"/>
+              </a:rPr>
+              <a:t>1</a:t>
+            </a:r>
+          </a:p>
+        </p:txBody>
+      </p:sp>
+      <p:sp>
+        <p:nvSpPr>
+          <p:cNvPr id="5" name="TextBox 4"/>
+          <p:cNvSpPr txBox="1"/>
+          <p:nvPr/>
+        </p:nvSpPr>
+        <p:spPr>
+          <a:xfrm>
+            <a:off x="1115568" y="1417320"/>
+            <a:ext cx="10527487" cy="685799"/>
+          </a:xfrm>
+          <a:prstGeom prst="rect">
+            <a:avLst/>
+          </a:prstGeom>
+          <a:noFill/>
+        </p:spPr>
+        <p:txBody>
+          <a:bodyPr wrap="square">
+            <a:spAutoFit/>
+          </a:bodyPr>
+          <a:lstStyle/>
+          <a:p>
+            <a:pPr>
               <a:spcAft>
-                <a:spcPts val="400"/>
+                <a:spcPts val="300"/>
               </a:spcAft>
             </a:pPr>
             <a:r>
-              <a:rPr sz="1800" b="1" i="0">
+              <a:rPr sz="1700" b="1" i="0">
+                <a:solidFill>
+                  <a:srgbClr val="1A1A1A"/>
+                </a:solidFill>
+                <a:latin typeface="Arial"/>
+              </a:rPr>
+              <a:t>A picture of what exists today</a:t>
+            </a:r>
+          </a:p>
+          <a:p>
+            <a:pPr>
+              <a:spcAft>
+                <a:spcPts val="300"/>
+              </a:spcAft>
+            </a:pPr>
+            <a:r>
+              <a:rPr sz="1550" b="0" i="0">
+                <a:solidFill>
+                  <a:srgbClr val="595959"/>
+                </a:solidFill>
+                <a:latin typeface="Arial"/>
+              </a:rPr>
+              <a:t>Discover</a:t>
+            </a:r>
+          </a:p>
+        </p:txBody>
+      </p:sp>
+      <p:sp>
+        <p:nvSpPr>
+          <p:cNvPr id="6" name="Rectangle 5"/>
+          <p:cNvSpPr/>
+          <p:nvPr/>
+        </p:nvSpPr>
+        <p:spPr>
+          <a:xfrm>
+            <a:off x="621792" y="2107692"/>
+            <a:ext cx="10881360" cy="12700"/>
+          </a:xfrm>
+          <a:prstGeom prst="rect">
+            <a:avLst/>
+          </a:prstGeom>
+          <a:solidFill>
+            <a:srgbClr val="DDECF4"/>
+          </a:solidFill>
+          <a:ln>
+            <a:noFill/>
+          </a:ln>
+          <a:effectLst/>
+        </p:spPr>
+        <p:style>
+          <a:lnRef idx="1">
+            <a:schemeClr val="accent1"/>
+          </a:lnRef>
+          <a:fillRef idx="3">
+            <a:schemeClr val="accent1"/>
+          </a:fillRef>
+          <a:effectRef idx="2">
+            <a:schemeClr val="accent1"/>
+          </a:effectRef>
+          <a:fontRef idx="minor">
+            <a:schemeClr val="lt1"/>
+          </a:fontRef>
+        </p:style>
+        <p:txBody>
+          <a:bodyPr rtlCol="0" anchor="ctr"/>
+          <a:lstStyle/>
+          <a:p>
+            <a:pPr algn="ctr"/>
+          </a:p>
+        </p:txBody>
+      </p:sp>
+      <p:sp>
+        <p:nvSpPr>
+          <p:cNvPr id="7" name="Oval 6"/>
+          <p:cNvSpPr/>
+          <p:nvPr/>
+        </p:nvSpPr>
+        <p:spPr>
+          <a:xfrm>
+            <a:off x="621792" y="2194560"/>
+            <a:ext cx="310896" cy="310896"/>
+          </a:xfrm>
+          <a:prstGeom prst="ellipse">
+            <a:avLst/>
+          </a:prstGeom>
+          <a:solidFill>
+            <a:srgbClr val="009CD6"/>
+          </a:solidFill>
+          <a:ln>
+            <a:noFill/>
+          </a:ln>
+          <a:effectLst/>
+        </p:spPr>
+        <p:style>
+          <a:lnRef idx="1">
+            <a:schemeClr val="accent1"/>
+          </a:lnRef>
+          <a:fillRef idx="3">
+            <a:schemeClr val="accent1"/>
+          </a:fillRef>
+          <a:effectRef idx="2">
+            <a:schemeClr val="accent1"/>
+          </a:effectRef>
+          <a:fontRef idx="minor">
+            <a:schemeClr val="lt1"/>
+          </a:fontRef>
+        </p:style>
+        <p:txBody>
+          <a:bodyPr rtlCol="0" anchor="ctr" lIns="0" rIns="0" tIns="0" bIns="0" wrap="square"/>
+          <a:lstStyle/>
+          <a:p>
+            <a:pPr algn="ctr"/>
+            <a:r>
+              <a:rPr sz="1300" b="1" i="0">
+                <a:solidFill>
+                  <a:srgbClr val="FFFFFF"/>
+                </a:solidFill>
+                <a:latin typeface="Arial"/>
+              </a:rPr>
+              <a:t>2</a:t>
+            </a:r>
+          </a:p>
+        </p:txBody>
+      </p:sp>
+      <p:sp>
+        <p:nvSpPr>
+          <p:cNvPr id="8" name="TextBox 7"/>
+          <p:cNvSpPr txBox="1"/>
+          <p:nvPr/>
+        </p:nvSpPr>
+        <p:spPr>
+          <a:xfrm>
+            <a:off x="1115568" y="2148840"/>
+            <a:ext cx="10527487" cy="685799"/>
+          </a:xfrm>
+          <a:prstGeom prst="rect">
+            <a:avLst/>
+          </a:prstGeom>
+          <a:noFill/>
+        </p:spPr>
+        <p:txBody>
+          <a:bodyPr wrap="square">
+            <a:spAutoFit/>
+          </a:bodyPr>
+          <a:lstStyle/>
+          <a:p>
+            <a:pPr>
+              <a:spcAft>
+                <a:spcPts val="300"/>
+              </a:spcAft>
+            </a:pPr>
+            <a:r>
+              <a:rPr sz="1700" b="1" i="0">
+                <a:solidFill>
+                  <a:srgbClr val="1A1A1A"/>
+                </a:solidFill>
+                <a:latin typeface="Arial"/>
+              </a:rPr>
+              <a:t>A ranked gap analysis</a:t>
+            </a:r>
+          </a:p>
+          <a:p>
+            <a:pPr>
+              <a:spcAft>
+                <a:spcPts val="300"/>
+              </a:spcAft>
+            </a:pPr>
+            <a:r>
+              <a:rPr sz="1550" b="0" i="0">
+                <a:solidFill>
+                  <a:srgbClr val="595959"/>
+                </a:solidFill>
+                <a:latin typeface="Arial"/>
+              </a:rPr>
+              <a:t>Assess</a:t>
+            </a:r>
+          </a:p>
+        </p:txBody>
+      </p:sp>
+      <p:sp>
+        <p:nvSpPr>
+          <p:cNvPr id="9" name="Rectangle 8"/>
+          <p:cNvSpPr/>
+          <p:nvPr/>
+        </p:nvSpPr>
+        <p:spPr>
+          <a:xfrm>
+            <a:off x="621792" y="2839212"/>
+            <a:ext cx="10881360" cy="12700"/>
+          </a:xfrm>
+          <a:prstGeom prst="rect">
+            <a:avLst/>
+          </a:prstGeom>
+          <a:solidFill>
+            <a:srgbClr val="DDECF4"/>
+          </a:solidFill>
+          <a:ln>
+            <a:noFill/>
+          </a:ln>
+          <a:effectLst/>
+        </p:spPr>
+        <p:style>
+          <a:lnRef idx="1">
+            <a:schemeClr val="accent1"/>
+          </a:lnRef>
+          <a:fillRef idx="3">
+            <a:schemeClr val="accent1"/>
+          </a:fillRef>
+          <a:effectRef idx="2">
+            <a:schemeClr val="accent1"/>
+          </a:effectRef>
+          <a:fontRef idx="minor">
+            <a:schemeClr val="lt1"/>
+          </a:fontRef>
+        </p:style>
+        <p:txBody>
+          <a:bodyPr rtlCol="0" anchor="ctr"/>
+          <a:lstStyle/>
+          <a:p>
+            <a:pPr algn="ctr"/>
+          </a:p>
+        </p:txBody>
+      </p:sp>
+      <p:sp>
+        <p:nvSpPr>
+          <p:cNvPr id="10" name="Oval 9"/>
+          <p:cNvSpPr/>
+          <p:nvPr/>
+        </p:nvSpPr>
+        <p:spPr>
+          <a:xfrm>
+            <a:off x="621792" y="2926079"/>
+            <a:ext cx="310896" cy="310896"/>
+          </a:xfrm>
+          <a:prstGeom prst="ellipse">
+            <a:avLst/>
+          </a:prstGeom>
+          <a:solidFill>
+            <a:srgbClr val="009CD6"/>
+          </a:solidFill>
+          <a:ln>
+            <a:noFill/>
+          </a:ln>
+          <a:effectLst/>
+        </p:spPr>
+        <p:style>
+          <a:lnRef idx="1">
+            <a:schemeClr val="accent1"/>
+          </a:lnRef>
+          <a:fillRef idx="3">
+            <a:schemeClr val="accent1"/>
+          </a:fillRef>
+          <a:effectRef idx="2">
+            <a:schemeClr val="accent1"/>
+          </a:effectRef>
+          <a:fontRef idx="minor">
+            <a:schemeClr val="lt1"/>
+          </a:fontRef>
+        </p:style>
+        <p:txBody>
+          <a:bodyPr rtlCol="0" anchor="ctr" lIns="0" rIns="0" tIns="0" bIns="0" wrap="square"/>
+          <a:lstStyle/>
+          <a:p>
+            <a:pPr algn="ctr"/>
+            <a:r>
+              <a:rPr sz="1300" b="1" i="0">
+                <a:solidFill>
+                  <a:srgbClr val="FFFFFF"/>
+                </a:solidFill>
+                <a:latin typeface="Arial"/>
+              </a:rPr>
+              <a:t>3</a:t>
+            </a:r>
+          </a:p>
+        </p:txBody>
+      </p:sp>
+      <p:sp>
+        <p:nvSpPr>
+          <p:cNvPr id="11" name="TextBox 10"/>
+          <p:cNvSpPr txBox="1"/>
+          <p:nvPr/>
+        </p:nvSpPr>
+        <p:spPr>
+          <a:xfrm>
+            <a:off x="1115568" y="2880360"/>
+            <a:ext cx="10527487" cy="685799"/>
+          </a:xfrm>
+          <a:prstGeom prst="rect">
+            <a:avLst/>
+          </a:prstGeom>
+          <a:noFill/>
+        </p:spPr>
+        <p:txBody>
+          <a:bodyPr wrap="square">
+            <a:spAutoFit/>
+          </a:bodyPr>
+          <a:lstStyle/>
+          <a:p>
+            <a:pPr>
+              <a:spcAft>
+                <a:spcPts val="300"/>
+              </a:spcAft>
+            </a:pPr>
+            <a:r>
+              <a:rPr sz="1700" b="1" i="0">
+                <a:solidFill>
+                  <a:srgbClr val="1A1A1A"/>
+                </a:solidFill>
+                <a:latin typeface="Arial"/>
+              </a:rPr>
+              <a:t>A localised framework with build, buy or share calls</a:t>
+            </a:r>
+          </a:p>
+          <a:p>
+            <a:pPr>
+              <a:spcAft>
+                <a:spcPts val="300"/>
+              </a:spcAft>
+            </a:pPr>
+            <a:r>
+              <a:rPr sz="1550" b="0" i="0">
+                <a:solidFill>
+                  <a:srgbClr val="595959"/>
+                </a:solidFill>
+                <a:latin typeface="Arial"/>
+              </a:rPr>
+              <a:t>Adapt</a:t>
+            </a:r>
+          </a:p>
+        </p:txBody>
+      </p:sp>
+      <p:sp>
+        <p:nvSpPr>
+          <p:cNvPr id="12" name="Rectangle 11"/>
+          <p:cNvSpPr/>
+          <p:nvPr/>
+        </p:nvSpPr>
+        <p:spPr>
+          <a:xfrm>
+            <a:off x="621792" y="3570732"/>
+            <a:ext cx="10881360" cy="12700"/>
+          </a:xfrm>
+          <a:prstGeom prst="rect">
+            <a:avLst/>
+          </a:prstGeom>
+          <a:solidFill>
+            <a:srgbClr val="DDECF4"/>
+          </a:solidFill>
+          <a:ln>
+            <a:noFill/>
+          </a:ln>
+          <a:effectLst/>
+        </p:spPr>
+        <p:style>
+          <a:lnRef idx="1">
+            <a:schemeClr val="accent1"/>
+          </a:lnRef>
+          <a:fillRef idx="3">
+            <a:schemeClr val="accent1"/>
+          </a:fillRef>
+          <a:effectRef idx="2">
+            <a:schemeClr val="accent1"/>
+          </a:effectRef>
+          <a:fontRef idx="minor">
+            <a:schemeClr val="lt1"/>
+          </a:fontRef>
+        </p:style>
+        <p:txBody>
+          <a:bodyPr rtlCol="0" anchor="ctr"/>
+          <a:lstStyle/>
+          <a:p>
+            <a:pPr algn="ctr"/>
+          </a:p>
+        </p:txBody>
+      </p:sp>
+      <p:sp>
+        <p:nvSpPr>
+          <p:cNvPr id="13" name="Oval 12"/>
+          <p:cNvSpPr/>
+          <p:nvPr/>
+        </p:nvSpPr>
+        <p:spPr>
+          <a:xfrm>
+            <a:off x="621792" y="3657600"/>
+            <a:ext cx="310896" cy="310896"/>
+          </a:xfrm>
+          <a:prstGeom prst="ellipse">
+            <a:avLst/>
+          </a:prstGeom>
+          <a:solidFill>
+            <a:srgbClr val="009CD6"/>
+          </a:solidFill>
+          <a:ln>
+            <a:noFill/>
+          </a:ln>
+          <a:effectLst/>
+        </p:spPr>
+        <p:style>
+          <a:lnRef idx="1">
+            <a:schemeClr val="accent1"/>
+          </a:lnRef>
+          <a:fillRef idx="3">
+            <a:schemeClr val="accent1"/>
+          </a:fillRef>
+          <a:effectRef idx="2">
+            <a:schemeClr val="accent1"/>
+          </a:effectRef>
+          <a:fontRef idx="minor">
+            <a:schemeClr val="lt1"/>
+          </a:fontRef>
+        </p:style>
+        <p:txBody>
+          <a:bodyPr rtlCol="0" anchor="ctr" lIns="0" rIns="0" tIns="0" bIns="0" wrap="square"/>
+          <a:lstStyle/>
+          <a:p>
+            <a:pPr algn="ctr"/>
+            <a:r>
+              <a:rPr sz="1300" b="1" i="0">
+                <a:solidFill>
+                  <a:srgbClr val="FFFFFF"/>
+                </a:solidFill>
+                <a:latin typeface="Arial"/>
+              </a:rPr>
+              <a:t>4</a:t>
+            </a:r>
+          </a:p>
+        </p:txBody>
+      </p:sp>
+      <p:sp>
+        <p:nvSpPr>
+          <p:cNvPr id="14" name="TextBox 13"/>
+          <p:cNvSpPr txBox="1"/>
+          <p:nvPr/>
+        </p:nvSpPr>
+        <p:spPr>
+          <a:xfrm>
+            <a:off x="1115568" y="3611880"/>
+            <a:ext cx="10527487" cy="685799"/>
+          </a:xfrm>
+          <a:prstGeom prst="rect">
+            <a:avLst/>
+          </a:prstGeom>
+          <a:noFill/>
+        </p:spPr>
+        <p:txBody>
+          <a:bodyPr wrap="square">
+            <a:spAutoFit/>
+          </a:bodyPr>
+          <a:lstStyle/>
+          <a:p>
+            <a:pPr>
+              <a:spcAft>
+                <a:spcPts val="300"/>
+              </a:spcAft>
+            </a:pPr>
+            <a:r>
+              <a:rPr sz="1700" b="1" i="0">
+                <a:solidFill>
+                  <a:srgbClr val="1A1A1A"/>
+                </a:solidFill>
+                <a:latin typeface="Arial"/>
+              </a:rPr>
+              <a:t>A target architecture — the designed future state</a:t>
+            </a:r>
+          </a:p>
+          <a:p>
+            <a:pPr>
+              <a:spcAft>
+                <a:spcPts val="300"/>
+              </a:spcAft>
+            </a:pPr>
+            <a:r>
+              <a:rPr sz="1550" b="0" i="0">
+                <a:solidFill>
+                  <a:srgbClr val="595959"/>
+                </a:solidFill>
+                <a:latin typeface="Arial"/>
+              </a:rPr>
+              <a:t>Plan</a:t>
+            </a:r>
+          </a:p>
+        </p:txBody>
+      </p:sp>
+      <p:sp>
+        <p:nvSpPr>
+          <p:cNvPr id="15" name="Rectangle 14"/>
+          <p:cNvSpPr/>
+          <p:nvPr/>
+        </p:nvSpPr>
+        <p:spPr>
+          <a:xfrm>
+            <a:off x="621792" y="4302252"/>
+            <a:ext cx="10881360" cy="12700"/>
+          </a:xfrm>
+          <a:prstGeom prst="rect">
+            <a:avLst/>
+          </a:prstGeom>
+          <a:solidFill>
+            <a:srgbClr val="DDECF4"/>
+          </a:solidFill>
+          <a:ln>
+            <a:noFill/>
+          </a:ln>
+          <a:effectLst/>
+        </p:spPr>
+        <p:style>
+          <a:lnRef idx="1">
+            <a:schemeClr val="accent1"/>
+          </a:lnRef>
+          <a:fillRef idx="3">
+            <a:schemeClr val="accent1"/>
+          </a:fillRef>
+          <a:effectRef idx="2">
+            <a:schemeClr val="accent1"/>
+          </a:effectRef>
+          <a:fontRef idx="minor">
+            <a:schemeClr val="lt1"/>
+          </a:fontRef>
+        </p:style>
+        <p:txBody>
+          <a:bodyPr rtlCol="0" anchor="ctr"/>
+          <a:lstStyle/>
+          <a:p>
+            <a:pPr algn="ctr"/>
+          </a:p>
+        </p:txBody>
+      </p:sp>
+      <p:sp>
+        <p:nvSpPr>
+          <p:cNvPr id="16" name="Oval 15"/>
+          <p:cNvSpPr/>
+          <p:nvPr/>
+        </p:nvSpPr>
+        <p:spPr>
+          <a:xfrm>
+            <a:off x="621792" y="4389120"/>
+            <a:ext cx="310896" cy="310896"/>
+          </a:xfrm>
+          <a:prstGeom prst="ellipse">
+            <a:avLst/>
+          </a:prstGeom>
+          <a:solidFill>
+            <a:srgbClr val="009CD6"/>
+          </a:solidFill>
+          <a:ln>
+            <a:noFill/>
+          </a:ln>
+          <a:effectLst/>
+        </p:spPr>
+        <p:style>
+          <a:lnRef idx="1">
+            <a:schemeClr val="accent1"/>
+          </a:lnRef>
+          <a:fillRef idx="3">
+            <a:schemeClr val="accent1"/>
+          </a:fillRef>
+          <a:effectRef idx="2">
+            <a:schemeClr val="accent1"/>
+          </a:effectRef>
+          <a:fontRef idx="minor">
+            <a:schemeClr val="lt1"/>
+          </a:fontRef>
+        </p:style>
+        <p:txBody>
+          <a:bodyPr rtlCol="0" anchor="ctr" lIns="0" rIns="0" tIns="0" bIns="0" wrap="square"/>
+          <a:lstStyle/>
+          <a:p>
+            <a:pPr algn="ctr"/>
+            <a:r>
+              <a:rPr sz="1300" b="1" i="0">
+                <a:solidFill>
+                  <a:srgbClr val="FFFFFF"/>
+                </a:solidFill>
+                <a:latin typeface="Arial"/>
+              </a:rPr>
+              <a:t>5</a:t>
+            </a:r>
+          </a:p>
+        </p:txBody>
+      </p:sp>
+      <p:sp>
+        <p:nvSpPr>
+          <p:cNvPr id="17" name="TextBox 16"/>
+          <p:cNvSpPr txBox="1"/>
+          <p:nvPr/>
+        </p:nvSpPr>
+        <p:spPr>
+          <a:xfrm>
+            <a:off x="1115568" y="4343400"/>
+            <a:ext cx="10527487" cy="685799"/>
+          </a:xfrm>
+          <a:prstGeom prst="rect">
+            <a:avLst/>
+          </a:prstGeom>
+          <a:noFill/>
+        </p:spPr>
+        <p:txBody>
+          <a:bodyPr wrap="square">
+            <a:spAutoFit/>
+          </a:bodyPr>
+          <a:lstStyle/>
+          <a:p>
+            <a:pPr>
+              <a:spcAft>
+                <a:spcPts val="300"/>
+              </a:spcAft>
+            </a:pPr>
+            <a:r>
+              <a:rPr sz="1700" b="1" i="0">
+                <a:solidFill>
+                  <a:srgbClr val="1A1A1A"/>
+                </a:solidFill>
+                <a:latin typeface="Arial"/>
+              </a:rPr>
+              <a:t>A sequenced, costed roadmap</a:t>
+            </a:r>
+          </a:p>
+          <a:p>
+            <a:pPr>
+              <a:spcAft>
+                <a:spcPts val="300"/>
+              </a:spcAft>
+            </a:pPr>
+            <a:r>
+              <a:rPr sz="1550" b="0" i="0">
+                <a:solidFill>
+                  <a:srgbClr val="595959"/>
+                </a:solidFill>
+                <a:latin typeface="Arial"/>
+              </a:rPr>
+              <a:t>Plan</a:t>
+            </a:r>
+          </a:p>
+        </p:txBody>
+      </p:sp>
+      <p:sp>
+        <p:nvSpPr>
+          <p:cNvPr id="18" name="Rectangle 17"/>
+          <p:cNvSpPr/>
+          <p:nvPr/>
+        </p:nvSpPr>
+        <p:spPr>
+          <a:xfrm>
+            <a:off x="621792" y="5033772"/>
+            <a:ext cx="10881360" cy="12700"/>
+          </a:xfrm>
+          <a:prstGeom prst="rect">
+            <a:avLst/>
+          </a:prstGeom>
+          <a:solidFill>
+            <a:srgbClr val="DDECF4"/>
+          </a:solidFill>
+          <a:ln>
+            <a:noFill/>
+          </a:ln>
+          <a:effectLst/>
+        </p:spPr>
+        <p:style>
+          <a:lnRef idx="1">
+            <a:schemeClr val="accent1"/>
+          </a:lnRef>
+          <a:fillRef idx="3">
+            <a:schemeClr val="accent1"/>
+          </a:fillRef>
+          <a:effectRef idx="2">
+            <a:schemeClr val="accent1"/>
+          </a:effectRef>
+          <a:fontRef idx="minor">
+            <a:schemeClr val="lt1"/>
+          </a:fontRef>
+        </p:style>
+        <p:txBody>
+          <a:bodyPr rtlCol="0" anchor="ctr"/>
+          <a:lstStyle/>
+          <a:p>
+            <a:pPr algn="ctr"/>
+          </a:p>
+        </p:txBody>
+      </p:sp>
+      <p:sp>
+        <p:nvSpPr>
+          <p:cNvPr id="19" name="Oval 18"/>
+          <p:cNvSpPr/>
+          <p:nvPr/>
+        </p:nvSpPr>
+        <p:spPr>
+          <a:xfrm>
+            <a:off x="621792" y="5120640"/>
+            <a:ext cx="310896" cy="310896"/>
+          </a:xfrm>
+          <a:prstGeom prst="ellipse">
+            <a:avLst/>
+          </a:prstGeom>
+          <a:solidFill>
+            <a:srgbClr val="009CD6"/>
+          </a:solidFill>
+          <a:ln>
+            <a:noFill/>
+          </a:ln>
+          <a:effectLst/>
+        </p:spPr>
+        <p:style>
+          <a:lnRef idx="1">
+            <a:schemeClr val="accent1"/>
+          </a:lnRef>
+          <a:fillRef idx="3">
+            <a:schemeClr val="accent1"/>
+          </a:fillRef>
+          <a:effectRef idx="2">
+            <a:schemeClr val="accent1"/>
+          </a:effectRef>
+          <a:fontRef idx="minor">
+            <a:schemeClr val="lt1"/>
+          </a:fontRef>
+        </p:style>
+        <p:txBody>
+          <a:bodyPr rtlCol="0" anchor="ctr" lIns="0" rIns="0" tIns="0" bIns="0" wrap="square"/>
+          <a:lstStyle/>
+          <a:p>
+            <a:pPr algn="ctr"/>
+            <a:r>
+              <a:rPr sz="1300" b="1" i="0">
+                <a:solidFill>
+                  <a:srgbClr val="FFFFFF"/>
+                </a:solidFill>
+                <a:latin typeface="Arial"/>
+              </a:rPr>
+              <a:t>6</a:t>
+            </a:r>
+          </a:p>
+        </p:txBody>
+      </p:sp>
+      <p:sp>
+        <p:nvSpPr>
+          <p:cNvPr id="20" name="TextBox 19"/>
+          <p:cNvSpPr txBox="1"/>
+          <p:nvPr/>
+        </p:nvSpPr>
+        <p:spPr>
+          <a:xfrm>
+            <a:off x="1115568" y="5074920"/>
+            <a:ext cx="10527487" cy="685799"/>
+          </a:xfrm>
+          <a:prstGeom prst="rect">
+            <a:avLst/>
+          </a:prstGeom>
+          <a:noFill/>
+        </p:spPr>
+        <p:txBody>
+          <a:bodyPr wrap="square">
+            <a:spAutoFit/>
+          </a:bodyPr>
+          <a:lstStyle/>
+          <a:p>
+            <a:pPr>
+              <a:spcAft>
+                <a:spcPts val="300"/>
+              </a:spcAft>
+            </a:pPr>
+            <a:r>
+              <a:rPr sz="1700" b="1" i="0">
+                <a:solidFill>
+                  <a:srgbClr val="1A1A1A"/>
+                </a:solidFill>
+                <a:latin typeface="Arial"/>
+              </a:rPr>
+              <a:t>A living, governed architecture</a:t>
+            </a:r>
+          </a:p>
+          <a:p>
+            <a:pPr>
+              <a:spcAft>
+                <a:spcPts val="300"/>
+              </a:spcAft>
+            </a:pPr>
+            <a:r>
+              <a:rPr sz="1550" b="0" i="0">
+                <a:solidFill>
+                  <a:srgbClr val="595959"/>
+                </a:solidFill>
+                <a:latin typeface="Arial"/>
+              </a:rPr>
+              <a:t>Execute &amp; Govern</a:t>
+            </a:r>
+          </a:p>
+        </p:txBody>
+      </p:sp>
+      <p:sp>
+        <p:nvSpPr>
+          <p:cNvPr id="21" name="TextBox 20"/>
+          <p:cNvSpPr txBox="1"/>
+          <p:nvPr/>
+        </p:nvSpPr>
+        <p:spPr>
+          <a:xfrm>
+            <a:off x="658368" y="5916168"/>
+            <a:ext cx="10881360" cy="548640"/>
+          </a:xfrm>
+          <a:prstGeom prst="rect">
+            <a:avLst/>
+          </a:prstGeom>
+          <a:noFill/>
+        </p:spPr>
+        <p:txBody>
+          <a:bodyPr wrap="square">
+            <a:spAutoFit/>
+          </a:bodyPr>
+          <a:lstStyle/>
+          <a:p>
+            <a:r>
+              <a:rPr sz="1550" b="1" i="0">
                 <a:solidFill>
                   <a:srgbClr val="006E96"/>
                 </a:solidFill>
                 <a:latin typeface="Arial"/>
               </a:rPr>
-              <a:t>Do this on your own sector. </a:t>
-            </a:r>
-            <a:r>
-              <a:rPr sz="1800" b="1" i="0">
-                <a:solidFill>
-                  <a:srgbClr val="1A1A1A"/>
-                </a:solidFill>
-                <a:latin typeface="Arial"/>
-              </a:rPr>
-              <a:t>Build your own demonstration canvas.</a:t>
-            </a:r>
-          </a:p>
-          <a:p>
-            <a:pPr algn="l">
-              <a:spcAft>
-                <a:spcPts val="400"/>
-              </a:spcAft>
-            </a:pPr>
-            <a:r>
-              <a:rPr sz="1800" b="0" i="0">
-                <a:solidFill>
-                  <a:srgbClr val="595959"/>
-                </a:solidFill>
-                <a:latin typeface="Arial"/>
-              </a:rPr>
-              <a:t>The prompt in the companion material gives you a one-page canvas (bodies, symptoms, stalled flagship). Before the next video.</a:t>
-            </a:r>
-          </a:p>
-        </p:txBody>
-      </p:sp>
-      <p:sp>
-        <p:nvSpPr>
-          <p:cNvPr id="5" name="TextBox 4"/>
+              <a:t>Six deliverables across five phases, produced in that order — Plan produces two.</a:t>
+            </a:r>
+          </a:p>
+        </p:txBody>
+      </p:sp>
+      <p:sp>
+        <p:nvSpPr>
+          <p:cNvPr id="22" name="TextBox 21"/>
           <p:cNvSpPr txBox="1"/>
           <p:nvPr/>
         </p:nvSpPr>
@@ -15156,41 +14665,6 @@
                 <a:latin typeface="Arial"/>
               </a:rPr>
               <a:t>4.1 · Meet Progressa — a real sector with a real fragmentation problem</a:t>
-            </a:r>
-          </a:p>
-        </p:txBody>
-      </p:sp>
-      <p:sp>
-        <p:nvSpPr>
-          <p:cNvPr id="6" name="TextBox 5"/>
-          <p:cNvSpPr txBox="1"/>
-          <p:nvPr/>
-        </p:nvSpPr>
-        <p:spPr>
-          <a:xfrm>
-            <a:off x="10058400" y="6473952"/>
-            <a:ext cx="1673352" cy="292608"/>
-          </a:xfrm>
-          <a:prstGeom prst="rect">
-            <a:avLst/>
-          </a:prstGeom>
-          <a:noFill/>
-        </p:spPr>
-        <p:txBody>
-          <a:bodyPr wrap="square">
-            <a:spAutoFit/>
-          </a:bodyPr>
-          <a:lstStyle/>
-          <a:p>
-            <a:pPr algn="r"/>
-            <a:r>
-              <a:rPr sz="900" b="0" i="0">
-                <a:solidFill>
-                  <a:srgbClr val="595959"/>
-                </a:solidFill>
-                <a:latin typeface="Arial"/>
-              </a:rPr>
-              <a:t>www.itu.int</a:t>
             </a:r>
           </a:p>
         </p:txBody>
@@ -15215,23 +14689,95 @@
       <p:grpSpPr/>
       <p:sp>
         <p:nvSpPr>
-          <p:cNvPr id="2" name="Rectangle 1"/>
-          <p:cNvSpPr/>
+          <p:cNvPr id="2" name="TextBox 1"/>
+          <p:cNvSpPr txBox="1"/>
           <p:nvPr/>
         </p:nvSpPr>
         <p:spPr>
           <a:xfrm>
-            <a:off x="457200" y="384048"/>
-            <a:ext cx="45720" cy="256032"/>
+            <a:off x="1005840" y="2103120"/>
+            <a:ext cx="10149840" cy="2377440"/>
           </a:xfrm>
           <a:prstGeom prst="rect">
             <a:avLst/>
           </a:prstGeom>
+          <a:noFill/>
+        </p:spPr>
+        <p:txBody>
+          <a:bodyPr wrap="square">
+            <a:spAutoFit/>
+          </a:bodyPr>
+          <a:lstStyle/>
+          <a:p>
+            <a:r>
+              <a:rPr sz="3000" b="1" i="0">
+                <a:solidFill>
+                  <a:srgbClr val="1A1A1A"/>
+                </a:solidFill>
+                <a:latin typeface="Arial"/>
+              </a:rPr>
+              <a:t>Progressa is a realistic education sector with the fragmentation problem most countries share — the canvas for running the whole method, step by step, so you can reproduce it on your own.</a:t>
+            </a:r>
+          </a:p>
+        </p:txBody>
+      </p:sp>
+      <p:sp>
+        <p:nvSpPr>
+          <p:cNvPr id="3" name="TextBox 2"/>
+          <p:cNvSpPr txBox="1"/>
+          <p:nvPr/>
+        </p:nvSpPr>
+        <p:spPr>
+          <a:xfrm>
+            <a:off x="1005840" y="1554480"/>
+            <a:ext cx="5486400" cy="365760"/>
+          </a:xfrm>
+          <a:prstGeom prst="rect">
+            <a:avLst/>
+          </a:prstGeom>
+          <a:noFill/>
+        </p:spPr>
+        <p:txBody>
+          <a:bodyPr wrap="square">
+            <a:spAutoFit/>
+          </a:bodyPr>
+          <a:lstStyle/>
+          <a:p>
+            <a:r>
+              <a:rPr sz="1200" b="1" i="0">
+                <a:solidFill>
+                  <a:srgbClr val="006E96"/>
+                </a:solidFill>
+                <a:latin typeface="Arial"/>
+              </a:rPr>
+              <a:t>IN ONE SENTENCE</a:t>
+            </a:r>
+          </a:p>
+        </p:txBody>
+      </p:sp>
+      <p:sp>
+        <p:nvSpPr>
+          <p:cNvPr id="4" name="Rounded Rectangle 3"/>
+          <p:cNvSpPr/>
+          <p:nvPr/>
+        </p:nvSpPr>
+        <p:spPr>
+          <a:xfrm>
+            <a:off x="658368" y="4709160"/>
+            <a:ext cx="10881360" cy="1554480"/>
+          </a:xfrm>
+          <a:prstGeom prst="roundRect">
+            <a:avLst>
+              <a:gd name="adj" fmla="val 4500"/>
+            </a:avLst>
+          </a:prstGeom>
           <a:solidFill>
-            <a:srgbClr val="009CD6"/>
+            <a:srgbClr val="FFFFFF"/>
           </a:solidFill>
-          <a:ln>
-            <a:noFill/>
+          <a:ln w="9525">
+            <a:solidFill>
+              <a:srgbClr val="009CD6"/>
+            </a:solidFill>
           </a:ln>
           <a:effectLst/>
         </p:spPr>
@@ -15250,98 +14796,49 @@
           </a:fontRef>
         </p:style>
         <p:txBody>
-          <a:bodyPr rtlCol="0" anchor="ctr"/>
-          <a:lstStyle/>
-          <a:p>
-            <a:pPr algn="ctr"/>
-          </a:p>
-        </p:txBody>
-      </p:sp>
-      <p:sp>
-        <p:nvSpPr>
-          <p:cNvPr id="3" name="TextBox 2"/>
-          <p:cNvSpPr txBox="1"/>
-          <p:nvPr/>
-        </p:nvSpPr>
-        <p:spPr>
-          <a:xfrm>
-            <a:off x="621792" y="274320"/>
-            <a:ext cx="11247120" cy="914400"/>
-          </a:xfrm>
-          <a:prstGeom prst="rect">
-            <a:avLst/>
-          </a:prstGeom>
-          <a:noFill/>
-        </p:spPr>
-        <p:txBody>
-          <a:bodyPr wrap="square">
-            <a:spAutoFit/>
+          <a:bodyPr rtlCol="0" anchor="ctr" wrap="square" lIns="228600" rIns="228600" tIns="109728" bIns="109728">
+            <a:noAutofit/>
           </a:bodyPr>
           <a:lstStyle/>
           <a:p>
-            <a:r>
-              <a:rPr sz="2800" b="1" i="0">
+            <a:pPr algn="l">
+              <a:spcAft>
+                <a:spcPts val="400"/>
+              </a:spcAft>
+            </a:pPr>
+            <a:r>
+              <a:rPr sz="1800" b="1" i="0">
+                <a:solidFill>
+                  <a:srgbClr val="006E96"/>
+                </a:solidFill>
+                <a:latin typeface="Arial"/>
+              </a:rPr>
+              <a:t>Do this on your own sector. </a:t>
+            </a:r>
+            <a:r>
+              <a:rPr sz="1800" b="1" i="0">
                 <a:solidFill>
                   <a:srgbClr val="1A1A1A"/>
                 </a:solidFill>
                 <a:latin typeface="Arial"/>
               </a:rPr>
-              <a:t>Sources</a:t>
-            </a:r>
-          </a:p>
-        </p:txBody>
-      </p:sp>
-      <p:sp>
-        <p:nvSpPr>
-          <p:cNvPr id="4" name="TextBox 3"/>
-          <p:cNvSpPr txBox="1"/>
-          <p:nvPr/>
-        </p:nvSpPr>
-        <p:spPr>
-          <a:xfrm>
-            <a:off x="658368" y="1554480"/>
-            <a:ext cx="10789920" cy="3840480"/>
-          </a:xfrm>
-          <a:prstGeom prst="rect">
-            <a:avLst/>
-          </a:prstGeom>
-          <a:noFill/>
-        </p:spPr>
-        <p:txBody>
-          <a:bodyPr wrap="square">
-            <a:spAutoFit/>
-          </a:bodyPr>
-          <a:lstStyle/>
-          <a:p>
-            <a:pPr>
+              <a:t>Build your own demonstration canvas.</a:t>
+            </a:r>
+          </a:p>
+          <a:p>
+            <a:pPr algn="l">
               <a:spcAft>
-                <a:spcPts val="1200"/>
+                <a:spcPts val="400"/>
               </a:spcAft>
             </a:pPr>
             <a:r>
-              <a:rPr sz="1700" b="0" i="0">
+              <a:rPr sz="1800" b="0" i="0">
                 <a:solidFill>
-                  <a:srgbClr val="1A1A1A"/>
+                  <a:srgbClr val="595959"/>
                 </a:solidFill>
                 <a:latin typeface="Arial"/>
               </a:rPr>
-              <a:t>•  PAERA v1.0 — §2.1 (Problem statement)</a:t>
-            </a:r>
-          </a:p>
-          <a:p>
-            <a:pPr>
-              <a:spcAft>
-                <a:spcPts val="1200"/>
-              </a:spcAft>
-            </a:pPr>
-            <a:r>
-              <a:rPr sz="1700" b="0" i="0">
-                <a:solidFill>
-                  <a:srgbClr val="1A1A1A"/>
-                </a:solidFill>
-                <a:latin typeface="Arial"/>
-              </a:rPr>
-              <a:t>•  PAERA v1.0 — §2.3 (Role of Enterprise Architecture)</a:t>
+              <a:t>The prompt in the companion material gives you a one-page canvas (bodies, symptoms, stalled flagship). Before the next video.</a:t>
             </a:r>
           </a:p>
         </p:txBody>
@@ -15349,40 +14846,6 @@
       <p:sp>
         <p:nvSpPr>
           <p:cNvPr id="5" name="TextBox 4"/>
-          <p:cNvSpPr txBox="1"/>
-          <p:nvPr/>
-        </p:nvSpPr>
-        <p:spPr>
-          <a:xfrm>
-            <a:off x="658368" y="5806440"/>
-            <a:ext cx="10789920" cy="457200"/>
-          </a:xfrm>
-          <a:prstGeom prst="rect">
-            <a:avLst/>
-          </a:prstGeom>
-          <a:noFill/>
-        </p:spPr>
-        <p:txBody>
-          <a:bodyPr wrap="square">
-            <a:spAutoFit/>
-          </a:bodyPr>
-          <a:lstStyle/>
-          <a:p>
-            <a:r>
-              <a:rPr sz="1400" b="1" i="0">
-                <a:solidFill>
-                  <a:srgbClr val="006E96"/>
-                </a:solidFill>
-                <a:latin typeface="Arial"/>
-              </a:rPr>
-              <a:t>Find the link in the description.</a:t>
-            </a:r>
-          </a:p>
-        </p:txBody>
-      </p:sp>
-      <p:sp>
-        <p:nvSpPr>
-          <p:cNvPr id="6" name="TextBox 5"/>
           <p:cNvSpPr txBox="1"/>
           <p:nvPr/>
         </p:nvSpPr>
@@ -15410,6 +14873,41 @@
                 <a:latin typeface="Arial"/>
               </a:rPr>
               <a:t>4.1 · Meet Progressa — a real sector with a real fragmentation problem</a:t>
+            </a:r>
+          </a:p>
+        </p:txBody>
+      </p:sp>
+      <p:sp>
+        <p:nvSpPr>
+          <p:cNvPr id="6" name="TextBox 5"/>
+          <p:cNvSpPr txBox="1"/>
+          <p:nvPr/>
+        </p:nvSpPr>
+        <p:spPr>
+          <a:xfrm>
+            <a:off x="10058400" y="6473952"/>
+            <a:ext cx="1673352" cy="292608"/>
+          </a:xfrm>
+          <a:prstGeom prst="rect">
+            <a:avLst/>
+          </a:prstGeom>
+          <a:noFill/>
+        </p:spPr>
+        <p:txBody>
+          <a:bodyPr wrap="square">
+            <a:spAutoFit/>
+          </a:bodyPr>
+          <a:lstStyle/>
+          <a:p>
+            <a:pPr algn="r"/>
+            <a:r>
+              <a:rPr sz="900" b="0" i="0">
+                <a:solidFill>
+                  <a:srgbClr val="595959"/>
+                </a:solidFill>
+                <a:latin typeface="Arial"/>
+              </a:rPr>
+              <a:t>www.itu.int</a:t>
             </a:r>
           </a:p>
         </p:txBody>

--- a/10-Knowledge-Products/KP1-GEA/videos/module_4/en/decks/KP1_M4_4.1_Deck_v0.2.pptx
+++ b/10-Knowledge-Products/KP1-GEA/videos/module_4/en/decks/KP1_M4_4.1_Deck_v0.2.pptx
@@ -12002,7 +12002,7 @@
                 </a:solidFill>
                 <a:latin typeface="Arial"/>
               </a:rPr>
-              <a:t>~3 minutes · standalone video · voice-over on text slides</a:t>
+              <a:t>standalone video · voice-over on text slides</a:t>
             </a:r>
           </a:p>
         </p:txBody>

--- a/10-Knowledge-Products/KP1-GEA/videos/module_4/en/decks/KP1_M4_4.1_Deck_v0.2.pptx
+++ b/10-Knowledge-Products/KP1-GEA/videos/module_4/en/decks/KP1_M4_4.1_Deck_v0.2.pptx
@@ -11866,7 +11866,7 @@
                 </a:solidFill>
                 <a:latin typeface="Arial"/>
               </a:rPr>
-              <a:t>KP1 · MODULE 4 · VIDEO 4.1</a:t>
+              <a:t>MODULE 4 · VIDEO 4.1</a:t>
             </a:r>
           </a:p>
         </p:txBody>
